--- a/morning-registration-activities/busted/downloads/Busted.pptx
+++ b/morning-registration-activities/busted/downloads/Busted.pptx
@@ -5294,7 +5294,7 @@
                 </a:solidFill>
                 <a:latin typeface="Karla"/>
               </a:rPr>
-              <a:t>Thalidomide had been tested for poisoning on rodents. Nobody had tested what it did to a baby before birth.</a:t>
+              <a:t>Thalidomide had been tested on rodents to see if it was poisonous. Nobody had tested what it did to a baby before birth.</a:t>
             </a:r>
           </a:p>
         </p:txBody>
@@ -16498,7 +16498,7 @@
                 </a:solidFill>
                 <a:latin typeface="Karla"/>
               </a:rPr>
-              <a:t>Change in mmol per litre, compared with a diet high in olive-oil type fat</a:t>
+              <a:t>Change in mmol per litre, compared with a diet high in fat like olive oil</a:t>
             </a:r>
           </a:p>
         </p:txBody>
@@ -17878,7 +17878,7 @@
                 </a:solidFill>
                 <a:latin typeface="Karla"/>
               </a:rPr>
-              <a:t>Next time you see a headline, ask the questions that caught these five.</a:t>
+              <a:t>Next time you see a headline, ask these five questions.</a:t>
             </a:r>
           </a:p>
         </p:txBody>
@@ -22350,7 +22350,7 @@
                 </a:solidFill>
                 <a:latin typeface="Karla"/>
               </a:rPr>
-              <a:t>One of the researchers who found the letters said it delayed agreement about sugar and heart disease for decades.</a:t>
+              <a:t>One of the researchers who found the letters said the review delayed agreement about sugar and heart disease for decades.</a:t>
             </a:r>
           </a:p>
         </p:txBody>

--- a/morning-registration-activities/busted/downloads/Busted.pptx
+++ b/morning-registration-activities/busted/downloads/Busted.pptx
@@ -170,7 +170,7 @@
                         <a:solidFill>
                           <a:srgbClr val="262422"/>
                         </a:solidFill>
-                        <a:latin typeface="Karla"/>
+                        <a:latin typeface="Calibri"/>
                       </a:rPr>
                       <a:t>about 2,000</a:t>
                     </a:r>
@@ -197,7 +197,7 @@
                         <a:solidFill>
                           <a:srgbClr val="262422"/>
                         </a:solidFill>
-                        <a:latin typeface="Karla"/>
+                        <a:latin typeface="Calibri"/>
                       </a:rPr>
                       <a:t>17</a:t>
                     </a:r>
@@ -260,7 +260,7 @@
                   <a:solidFill>
                     <a:srgbClr val="262422"/>
                   </a:solidFill>
-                  <a:latin typeface="Karla"/>
+                  <a:latin typeface="Calibri"/>
                 </a:defRPr>
               </a:pPr>
             </a:p>
@@ -304,7 +304,7 @@
                 <a:solidFill>
                   <a:srgbClr val="262422"/>
                 </a:solidFill>
-                <a:latin typeface="Karla"/>
+                <a:latin typeface="Calibri"/>
               </a:defRPr>
             </a:pPr>
           </a:p>
@@ -342,7 +342,7 @@
           <a:solidFill>
             <a:srgbClr val="262422"/>
           </a:solidFill>
-          <a:latin typeface="Karla"/>
+          <a:latin typeface="Calibri"/>
         </a:defRPr>
       </a:pPr>
       <a:endParaRPr lang="en-US"/>
@@ -395,7 +395,7 @@
                         <a:solidFill>
                           <a:srgbClr val="262422"/>
                         </a:solidFill>
-                        <a:latin typeface="Karla"/>
+                        <a:latin typeface="Calibri"/>
                       </a:rPr>
                       <a:t>0.07</a:t>
                     </a:r>
@@ -422,7 +422,7 @@
                         <a:solidFill>
                           <a:srgbClr val="262422"/>
                         </a:solidFill>
-                        <a:latin typeface="Karla"/>
+                        <a:latin typeface="Calibri"/>
                       </a:rPr>
                       <a:t>0.57</a:t>
                     </a:r>
@@ -449,7 +449,7 @@
                         <a:solidFill>
                           <a:srgbClr val="262422"/>
                         </a:solidFill>
-                        <a:latin typeface="Karla"/>
+                        <a:latin typeface="Calibri"/>
                       </a:rPr>
                       <a:t>1.39</a:t>
                     </a:r>
@@ -476,7 +476,7 @@
                         <a:solidFill>
                           <a:srgbClr val="262422"/>
                         </a:solidFill>
-                        <a:latin typeface="Karla"/>
+                        <a:latin typeface="Calibri"/>
                       </a:rPr>
                       <a:t>2.27</a:t>
                     </a:r>
@@ -551,7 +551,7 @@
                   <a:solidFill>
                     <a:srgbClr val="262422"/>
                   </a:solidFill>
-                  <a:latin typeface="Karla"/>
+                  <a:latin typeface="Calibri"/>
                 </a:defRPr>
               </a:pPr>
             </a:p>
@@ -587,7 +587,7 @@
                     <a:solidFill>
                       <a:srgbClr val="56524B"/>
                     </a:solidFill>
-                    <a:latin typeface="Karla"/>
+                    <a:latin typeface="Calibri"/>
                   </a:rPr>
                   <a:t>Cigarettes smoked a day</a:t>
                 </a:r>
@@ -616,7 +616,7 @@
                 <a:solidFill>
                   <a:srgbClr val="262422"/>
                 </a:solidFill>
-                <a:latin typeface="Karla"/>
+                <a:latin typeface="Calibri"/>
               </a:defRPr>
             </a:pPr>
           </a:p>
@@ -654,7 +654,7 @@
           <a:solidFill>
             <a:srgbClr val="262422"/>
           </a:solidFill>
-          <a:latin typeface="Karla"/>
+          <a:latin typeface="Calibri"/>
         </a:defRPr>
       </a:pPr>
       <a:endParaRPr lang="en-US"/>
@@ -707,7 +707,7 @@
                         <a:solidFill>
                           <a:srgbClr val="262422"/>
                         </a:solidFill>
-                        <a:latin typeface="Karla"/>
+                        <a:latin typeface="Calibri"/>
                       </a:rPr>
                       <a:t>15.2</a:t>
                     </a:r>
@@ -734,7 +734,7 @@
                         <a:solidFill>
                           <a:srgbClr val="262422"/>
                         </a:solidFill>
-                        <a:latin typeface="Karla"/>
+                        <a:latin typeface="Calibri"/>
                       </a:rPr>
                       <a:t>2.2</a:t>
                     </a:r>
@@ -761,7 +761,7 @@
                         <a:solidFill>
                           <a:srgbClr val="262422"/>
                         </a:solidFill>
-                        <a:latin typeface="Karla"/>
+                        <a:latin typeface="Calibri"/>
                       </a:rPr>
                       <a:t>1.5</a:t>
                     </a:r>
@@ -788,7 +788,7 @@
                         <a:solidFill>
                           <a:srgbClr val="262422"/>
                         </a:solidFill>
-                        <a:latin typeface="Karla"/>
+                        <a:latin typeface="Calibri"/>
                       </a:rPr>
                       <a:t>1.0</a:t>
                     </a:r>
@@ -815,7 +815,7 @@
                         <a:solidFill>
                           <a:srgbClr val="262422"/>
                         </a:solidFill>
-                        <a:latin typeface="Karla"/>
+                        <a:latin typeface="Calibri"/>
                       </a:rPr>
                       <a:t>0.7</a:t>
                     </a:r>
@@ -896,7 +896,7 @@
                   <a:solidFill>
                     <a:srgbClr val="262422"/>
                   </a:solidFill>
-                  <a:latin typeface="Karla"/>
+                  <a:latin typeface="Calibri"/>
                 </a:defRPr>
               </a:pPr>
             </a:p>
@@ -932,7 +932,7 @@
                     <a:solidFill>
                       <a:srgbClr val="56524B"/>
                     </a:solidFill>
-                    <a:latin typeface="Karla"/>
+                    <a:latin typeface="Calibri"/>
                   </a:rPr>
                   <a:t>Survey years</a:t>
                 </a:r>
@@ -961,7 +961,7 @@
                 <a:solidFill>
                   <a:srgbClr val="262422"/>
                 </a:solidFill>
-                <a:latin typeface="Karla"/>
+                <a:latin typeface="Calibri"/>
               </a:defRPr>
             </a:pPr>
           </a:p>
@@ -999,7 +999,7 @@
           <a:solidFill>
             <a:srgbClr val="262422"/>
           </a:solidFill>
-          <a:latin typeface="Karla"/>
+          <a:latin typeface="Calibri"/>
         </a:defRPr>
       </a:pPr>
       <a:endParaRPr lang="en-US"/>
@@ -1131,7 +1131,7 @@
                   <a:solidFill>
                     <a:srgbClr val="262422"/>
                   </a:solidFill>
-                  <a:latin typeface="Karla"/>
+                  <a:latin typeface="Calibri"/>
                 </a:defRPr>
               </a:pPr>
             </a:p>
@@ -1173,7 +1173,7 @@
           <a:p>
             <a:pPr>
               <a:defRPr sz="1100">
-                <a:latin typeface="Karla"/>
+                <a:latin typeface="Calibri"/>
               </a:defRPr>
             </a:pPr>
           </a:p>
@@ -1209,7 +1209,7 @@
         <a:p>
           <a:pPr>
             <a:defRPr sz="1100">
-              <a:latin typeface="Karla"/>
+              <a:latin typeface="Calibri"/>
             </a:defRPr>
           </a:pPr>
         </a:p>
@@ -1226,7 +1226,7 @@
           <a:solidFill>
             <a:srgbClr val="262422"/>
           </a:solidFill>
-          <a:latin typeface="Karla"/>
+          <a:latin typeface="Calibri"/>
         </a:defRPr>
       </a:pPr>
       <a:endParaRPr lang="en-US"/>
@@ -4299,7 +4299,7 @@
                 <a:solidFill>
                   <a:srgbClr val="AD2E3C"/>
                 </a:solidFill>
-                <a:latin typeface="Karla"/>
+                <a:latin typeface="Calibri"/>
               </a:rPr>
               <a:t>MORNING REGISTRATION ACTIVITIES</a:t>
             </a:r>
@@ -4382,11 +4382,11 @@
               </a:spcAft>
             </a:pPr>
             <a:r>
-              <a:rPr sz="3000" b="1" i="0">
+              <a:rPr sz="3000" b="0" i="0">
                 <a:solidFill>
                   <a:srgbClr val="262422"/>
                 </a:solidFill>
-                <a:latin typeface="Libre Caslon Display"/>
+                <a:latin typeface="Georgia"/>
               </a:rPr>
               <a:t>The Daily Claim</a:t>
             </a:r>
@@ -4473,7 +4473,7 @@
                 <a:solidFill>
                   <a:srgbClr val="56524B"/>
                 </a:solidFill>
-                <a:latin typeface="Karla"/>
+                <a:latin typeface="Calibri"/>
               </a:rPr>
               <a:t>EVERY MORNING, ONE STORY</a:t>
             </a:r>
@@ -4516,7 +4516,7 @@
                 <a:solidFill>
                   <a:srgbClr val="56524B"/>
                 </a:solidFill>
-                <a:latin typeface="Karla"/>
+                <a:latin typeface="Calibri"/>
               </a:rPr>
               <a:t>VOLUME ONE</a:t>
             </a:r>
@@ -4559,7 +4559,7 @@
                 <a:solidFill>
                   <a:srgbClr val="56524B"/>
                 </a:solidFill>
-                <a:latin typeface="Karla"/>
+                <a:latin typeface="Calibri"/>
               </a:rPr>
               <a:t>FIVE DAYS, FIVE CLAIMS</a:t>
             </a:r>
@@ -4704,7 +4704,7 @@
                 <a:solidFill>
                   <a:srgbClr val="AD2E3C"/>
                 </a:solidFill>
-                <a:latin typeface="Karla"/>
+                <a:latin typeface="Calibri"/>
               </a:rPr>
               <a:t>BUSTED</a:t>
             </a:r>
@@ -4747,7 +4747,7 @@
                 <a:solidFill>
                   <a:srgbClr val="56524B"/>
                 </a:solidFill>
-                <a:latin typeface="Karla"/>
+                <a:latin typeface="Calibri"/>
               </a:rPr>
               <a:t>Five claims that were printed as true, and the evidence that took them apart</a:t>
             </a:r>
@@ -4802,7 +4802,7 @@
                 <a:solidFill>
                   <a:srgbClr val="FFFDF7"/>
                 </a:solidFill>
-                <a:latin typeface="Karla"/>
+                <a:latin typeface="Calibri"/>
               </a:rPr>
               <a:t>VOLUME ONE</a:t>
             </a:r>
@@ -4870,7 +4870,7 @@
                 <a:solidFill>
                   <a:srgbClr val="8C877D"/>
                 </a:solidFill>
-                <a:latin typeface="Karla"/>
+                <a:latin typeface="Calibri"/>
               </a:rPr>
               <a:t>The Pastoral Guide</a:t>
             </a:r>
@@ -4913,7 +4913,7 @@
                 <a:solidFill>
                   <a:srgbClr val="8C877D"/>
                 </a:solidFill>
-                <a:latin typeface="Karla"/>
+                <a:latin typeface="Calibri"/>
               </a:rPr>
               <a:t>1 / 23</a:t>
             </a:r>
@@ -5018,7 +5018,7 @@
                 <a:solidFill>
                   <a:srgbClr val="AD2E3C"/>
                 </a:solidFill>
-                <a:latin typeface="Karla"/>
+                <a:latin typeface="Calibri"/>
               </a:rPr>
               <a:t>BUSTED  ·  TUESDAY  ·  STORY 2 OF 5</a:t>
             </a:r>
@@ -5057,11 +5057,11 @@
               </a:spcAft>
             </a:pPr>
             <a:r>
-              <a:rPr sz="2800" b="1" i="0">
+              <a:rPr sz="2800" b="0" i="0">
                 <a:solidFill>
                   <a:srgbClr val="262422"/>
                 </a:solidFill>
-                <a:latin typeface="Libre Caslon Display"/>
+                <a:latin typeface="Georgia"/>
               </a:rPr>
               <a:t>What really happened</a:t>
             </a:r>
@@ -5162,7 +5162,7 @@
                 <a:solidFill>
                   <a:srgbClr val="AD2E3C"/>
                 </a:solidFill>
-                <a:latin typeface="Karla"/>
+                <a:latin typeface="Calibri"/>
               </a:rPr>
               <a:t>BUSTED</a:t>
             </a:r>
@@ -5249,7 +5249,7 @@
                 <a:solidFill>
                   <a:srgbClr val="FFFDF7"/>
                 </a:solidFill>
-                <a:latin typeface="Karla"/>
+                <a:latin typeface="Calibri"/>
               </a:rPr>
               <a:t>1</a:t>
             </a:r>
@@ -5292,7 +5292,7 @@
                 <a:solidFill>
                   <a:srgbClr val="262422"/>
                 </a:solidFill>
-                <a:latin typeface="Karla"/>
+                <a:latin typeface="Calibri"/>
               </a:rPr>
               <a:t>Thalidomide had been tested on rodents to see if it was poisonous. Nobody had tested what it did to a baby before birth.</a:t>
             </a:r>
@@ -5379,7 +5379,7 @@
                 <a:solidFill>
                   <a:srgbClr val="FFFDF7"/>
                 </a:solidFill>
-                <a:latin typeface="Karla"/>
+                <a:latin typeface="Calibri"/>
               </a:rPr>
               <a:t>2</a:t>
             </a:r>
@@ -5422,7 +5422,7 @@
                 <a:solidFill>
                   <a:srgbClr val="262422"/>
                 </a:solidFill>
-                <a:latin typeface="Karla"/>
+                <a:latin typeface="Calibri"/>
               </a:rPr>
               <a:t>In 1961, doctors in Germany and Australia linked it to birth defects. More than 10,000 babies were affected worldwide, and many did not survive.</a:t>
             </a:r>
@@ -5509,7 +5509,7 @@
                 <a:solidFill>
                   <a:srgbClr val="FFFDF7"/>
                 </a:solidFill>
-                <a:latin typeface="Karla"/>
+                <a:latin typeface="Calibri"/>
               </a:rPr>
               <a:t>3</a:t>
             </a:r>
@@ -5552,7 +5552,7 @@
                 <a:solidFill>
                   <a:srgbClr val="262422"/>
                 </a:solidFill>
-                <a:latin typeface="Karla"/>
+                <a:latin typeface="Calibri"/>
               </a:rPr>
               <a:t>In the United States, Frances Kelsey kept asking for better evidence and kept saying no. In 1962 the President gave her an award for it.</a:t>
             </a:r>
@@ -5639,7 +5639,7 @@
                 <a:solidFill>
                   <a:srgbClr val="EBC4C6"/>
                 </a:solidFill>
-                <a:latin typeface="Karla"/>
+                <a:latin typeface="Calibri"/>
               </a:rPr>
               <a:t>THE QUESTION THAT WOULD HAVE CAUGHT IT</a:t>
             </a:r>
@@ -5678,11 +5678,11 @@
               </a:spcAft>
             </a:pPr>
             <a:r>
-              <a:rPr sz="1800" b="1" i="0">
+              <a:rPr sz="1800" b="0" i="0">
                 <a:solidFill>
                   <a:srgbClr val="FFFDF7"/>
                 </a:solidFill>
-                <a:latin typeface="Libre Caslon Display"/>
+                <a:latin typeface="Georgia"/>
               </a:rPr>
               <a:t>Has it been tested, and by whom?</a:t>
             </a:r>
@@ -5750,7 +5750,7 @@
                 <a:solidFill>
                   <a:srgbClr val="8C877D"/>
                 </a:solidFill>
-                <a:latin typeface="Karla"/>
+                <a:latin typeface="Calibri"/>
               </a:rPr>
               <a:t>The Pastoral Guide</a:t>
             </a:r>
@@ -5793,7 +5793,7 @@
                 <a:solidFill>
                   <a:srgbClr val="8C877D"/>
                 </a:solidFill>
-                <a:latin typeface="Karla"/>
+                <a:latin typeface="Calibri"/>
               </a:rPr>
               <a:t>10 / 23</a:t>
             </a:r>
@@ -5898,7 +5898,7 @@
                 <a:solidFill>
                   <a:srgbClr val="AD2E3C"/>
                 </a:solidFill>
-                <a:latin typeface="Karla"/>
+                <a:latin typeface="Calibri"/>
               </a:rPr>
               <a:t>BUSTED  ·  WEDNESDAY</a:t>
             </a:r>
@@ -5941,7 +5941,7 @@
                 <a:solidFill>
                   <a:srgbClr val="8C877D"/>
                 </a:solidFill>
-                <a:latin typeface="Karla"/>
+                <a:latin typeface="Calibri"/>
               </a:rPr>
               <a:t>A recreated front page</a:t>
             </a:r>
@@ -6024,11 +6024,11 @@
               </a:spcAft>
             </a:pPr>
             <a:r>
-              <a:rPr sz="3000" b="1" i="0">
+              <a:rPr sz="3000" b="0" i="0">
                 <a:solidFill>
                   <a:srgbClr val="262422"/>
                 </a:solidFill>
-                <a:latin typeface="Libre Caslon Display"/>
+                <a:latin typeface="Georgia"/>
               </a:rPr>
               <a:t>The Daily Claim</a:t>
             </a:r>
@@ -6115,7 +6115,7 @@
                 <a:solidFill>
                   <a:srgbClr val="56524B"/>
                 </a:solidFill>
-                <a:latin typeface="Karla"/>
+                <a:latin typeface="Calibri"/>
               </a:rPr>
               <a:t>NEW YORK, 1946</a:t>
             </a:r>
@@ -6158,7 +6158,7 @@
                 <a:solidFill>
                   <a:srgbClr val="56524B"/>
                 </a:solidFill>
-                <a:latin typeface="Karla"/>
+                <a:latin typeface="Calibri"/>
               </a:rPr>
               <a:t>VOLUME ONE</a:t>
             </a:r>
@@ -6201,7 +6201,7 @@
                 <a:solidFill>
                   <a:srgbClr val="56524B"/>
                 </a:solidFill>
-                <a:latin typeface="Karla"/>
+                <a:latin typeface="Calibri"/>
               </a:rPr>
               <a:t>STORY 3 OF 5</a:t>
             </a:r>
@@ -6284,11 +6284,11 @@
               </a:spcAft>
             </a:pPr>
             <a:r>
-              <a:rPr sz="2800" b="1" i="0">
+              <a:rPr sz="2800" b="0" i="0">
                 <a:solidFill>
                   <a:srgbClr val="262422"/>
                 </a:solidFill>
-                <a:latin typeface="Libre Caslon Display"/>
+                <a:latin typeface="Georgia"/>
               </a:rPr>
               <a:t>MORE DOCTORS SMOKE CAMELS</a:t>
             </a:r>
@@ -6296,11 +6296,11 @@
               <a:rPr lang="en-GB"/>
             </a:br>
             <a:r>
-              <a:rPr sz="2800" b="1" i="0">
+              <a:rPr sz="2800" b="0" i="0">
                 <a:solidFill>
                   <a:srgbClr val="262422"/>
                 </a:solidFill>
-                <a:latin typeface="Libre Caslon Display"/>
+                <a:latin typeface="Georgia"/>
               </a:rPr>
               <a:t>THAN ANY OTHER CIGARETTE</a:t>
             </a:r>
@@ -6688,11 +6688,11 @@
               </a:spcAft>
             </a:pPr>
             <a:r>
-              <a:rPr sz="1500" b="1" i="0">
+              <a:rPr sz="1500" b="0" i="0">
                 <a:solidFill>
                   <a:srgbClr val="AD2E3C"/>
                 </a:solidFill>
-                <a:latin typeface="Libre Caslon Display"/>
+                <a:latin typeface="Georgia"/>
               </a:rPr>
               <a:t>“More doctors smoke Camels than any other cigarette.”</a:t>
             </a:r>
@@ -6735,7 +6735,7 @@
                 <a:solidFill>
                   <a:srgbClr val="56524B"/>
                 </a:solidFill>
-                <a:latin typeface="Karla"/>
+                <a:latin typeface="Calibri"/>
               </a:rPr>
               <a:t>THE ADVERT’S SLOGAN, 1946</a:t>
             </a:r>
@@ -6803,7 +6803,7 @@
                 <a:solidFill>
                   <a:srgbClr val="8C877D"/>
                 </a:solidFill>
-                <a:latin typeface="Karla"/>
+                <a:latin typeface="Calibri"/>
               </a:rPr>
               <a:t>The Pastoral Guide</a:t>
             </a:r>
@@ -6846,7 +6846,7 @@
                 <a:solidFill>
                   <a:srgbClr val="8C877D"/>
                 </a:solidFill>
-                <a:latin typeface="Karla"/>
+                <a:latin typeface="Calibri"/>
               </a:rPr>
               <a:t>11 / 23</a:t>
             </a:r>
@@ -6951,64 +6951,9 @@
                 <a:solidFill>
                   <a:srgbClr val="AD2E3C"/>
                 </a:solidFill>
-                <a:latin typeface="Karla"/>
+                <a:latin typeface="Calibri"/>
               </a:rPr>
               <a:t>BUSTED  ·  WEDNESDAY  ·  STORY 3 OF 5</a:t>
-            </a:r>
-          </a:p>
-        </p:txBody>
-      </p:sp>
-      <p:sp>
-        <p:nvSpPr>
-          <p:cNvPr id="4" name="Rounded Rectangle 3"/>
-          <p:cNvSpPr/>
-          <p:nvPr/>
-        </p:nvSpPr>
-        <p:spPr>
-          <a:xfrm>
-            <a:off x="7640472" y="246888"/>
-            <a:ext cx="817727" cy="237744"/>
-          </a:xfrm>
-          <a:prstGeom prst="roundRect">
-            <a:avLst>
-              <a:gd name="adj" fmla="val 50000"/>
-            </a:avLst>
-          </a:prstGeom>
-          <a:solidFill>
-            <a:srgbClr val="AD2E3C"/>
-          </a:solidFill>
-          <a:ln>
-            <a:noFill/>
-          </a:ln>
-          <a:effectLst/>
-        </p:spPr>
-        <p:style>
-          <a:lnRef idx="1">
-            <a:schemeClr val="accent1"/>
-          </a:lnRef>
-          <a:fillRef idx="3">
-            <a:schemeClr val="accent1"/>
-          </a:fillRef>
-          <a:effectRef idx="0">
-            <a:schemeClr val="accent1"/>
-          </a:effectRef>
-          <a:fontRef idx="minor">
-            <a:schemeClr val="lt1"/>
-          </a:fontRef>
-        </p:style>
-        <p:txBody>
-          <a:bodyPr rtlCol="0" anchor="ctr" wrap="none" lIns="0" rIns="0" tIns="0" bIns="0"/>
-          <a:lstStyle/>
-          <a:p>
-            <a:pPr algn="ctr"/>
-            <a:r>
-              <a:rPr sz="950" b="1" spc="90">
-                <a:solidFill>
-                  <a:srgbClr val="FFFDF7"/>
-                </a:solidFill>
-                <a:latin typeface="Karla"/>
-              </a:rPr>
-              <a:t>ARGUE</a:t>
             </a:r>
           </a:p>
         </p:txBody>
@@ -7049,7 +6994,7 @@
                 <a:solidFill>
                   <a:srgbClr val="56524B"/>
                 </a:solidFill>
-                <a:latin typeface="Karla"/>
+                <a:latin typeface="Calibri"/>
               </a:rPr>
               <a:t>THE CLAIM</a:t>
             </a:r>
@@ -7182,11 +7127,11 @@
               </a:spcAft>
             </a:pPr>
             <a:r>
-              <a:rPr sz="2400" b="1" i="0">
+              <a:rPr sz="2400" b="0" i="0">
                 <a:solidFill>
                   <a:srgbClr val="AD2E3C"/>
                 </a:solidFill>
-                <a:latin typeface="Libre Caslon Display"/>
+                <a:latin typeface="Georgia"/>
               </a:rPr>
               <a:t>“If doctors smoke them, cigarettes can’t be that bad for you.”</a:t>
             </a:r>
@@ -7229,7 +7174,7 @@
                 <a:solidFill>
                   <a:srgbClr val="262422"/>
                 </a:solidFill>
-                <a:latin typeface="Karla"/>
+                <a:latin typeface="Calibri"/>
               </a:rPr>
               <a:t>Hands up for agree, then for disagree, then two or three people say why.</a:t>
             </a:r>
@@ -7381,11 +7326,11 @@
               </a:spcAft>
             </a:pPr>
             <a:r>
-              <a:rPr sz="1400" b="1" i="0">
+              <a:rPr sz="1400" b="0" i="0">
                 <a:solidFill>
                   <a:srgbClr val="262422"/>
                 </a:solidFill>
-                <a:latin typeface="Libre Caslon Display"/>
+                <a:latin typeface="Georgia"/>
               </a:rPr>
               <a:t>Who is saying it?</a:t>
             </a:r>
@@ -7537,11 +7482,11 @@
               </a:spcAft>
             </a:pPr>
             <a:r>
-              <a:rPr sz="1400" b="1" i="0">
+              <a:rPr sz="1400" b="0" i="0">
                 <a:solidFill>
                   <a:srgbClr val="262422"/>
                 </a:solidFill>
-                <a:latin typeface="Libre Caslon Display"/>
+                <a:latin typeface="Georgia"/>
               </a:rPr>
               <a:t>Who gains if you believe it?</a:t>
             </a:r>
@@ -7693,11 +7638,11 @@
               </a:spcAft>
             </a:pPr>
             <a:r>
-              <a:rPr sz="1400" b="1" i="0">
+              <a:rPr sz="1400" b="0" i="0">
                 <a:solidFill>
                   <a:srgbClr val="262422"/>
                 </a:solidFill>
-                <a:latin typeface="Libre Caslon Display"/>
+                <a:latin typeface="Georgia"/>
               </a:rPr>
               <a:t>What would you need to see first?</a:t>
             </a:r>
@@ -7765,7 +7710,7 @@
                 <a:solidFill>
                   <a:srgbClr val="8C877D"/>
                 </a:solidFill>
-                <a:latin typeface="Karla"/>
+                <a:latin typeface="Calibri"/>
               </a:rPr>
               <a:t>The Pastoral Guide</a:t>
             </a:r>
@@ -7808,7 +7753,7 @@
                 <a:solidFill>
                   <a:srgbClr val="8C877D"/>
                 </a:solidFill>
-                <a:latin typeface="Karla"/>
+                <a:latin typeface="Calibri"/>
               </a:rPr>
               <a:t>12 / 23</a:t>
             </a:r>
@@ -7913,64 +7858,9 @@
                 <a:solidFill>
                   <a:srgbClr val="AD2E3C"/>
                 </a:solidFill>
-                <a:latin typeface="Karla"/>
+                <a:latin typeface="Calibri"/>
               </a:rPr>
               <a:t>BUSTED  ·  WEDNESDAY  ·  STORY 3 OF 5</a:t>
-            </a:r>
-          </a:p>
-        </p:txBody>
-      </p:sp>
-      <p:sp>
-        <p:nvSpPr>
-          <p:cNvPr id="4" name="Rounded Rectangle 3"/>
-          <p:cNvSpPr/>
-          <p:nvPr/>
-        </p:nvSpPr>
-        <p:spPr>
-          <a:xfrm>
-            <a:off x="7406333" y="246888"/>
-            <a:ext cx="1051866" cy="237744"/>
-          </a:xfrm>
-          <a:prstGeom prst="roundRect">
-            <a:avLst>
-              <a:gd name="adj" fmla="val 50000"/>
-            </a:avLst>
-          </a:prstGeom>
-          <a:solidFill>
-            <a:srgbClr val="AD2E3C"/>
-          </a:solidFill>
-          <a:ln>
-            <a:noFill/>
-          </a:ln>
-          <a:effectLst/>
-        </p:spPr>
-        <p:style>
-          <a:lnRef idx="1">
-            <a:schemeClr val="accent1"/>
-          </a:lnRef>
-          <a:fillRef idx="3">
-            <a:schemeClr val="accent1"/>
-          </a:fillRef>
-          <a:effectRef idx="0">
-            <a:schemeClr val="accent1"/>
-          </a:effectRef>
-          <a:fontRef idx="minor">
-            <a:schemeClr val="lt1"/>
-          </a:fontRef>
-        </p:style>
-        <p:txBody>
-          <a:bodyPr rtlCol="0" anchor="ctr" wrap="none" lIns="0" rIns="0" tIns="0" bIns="0"/>
-          <a:lstStyle/>
-          <a:p>
-            <a:pPr algn="ctr"/>
-            <a:r>
-              <a:rPr sz="950" b="1" spc="90">
-                <a:solidFill>
-                  <a:srgbClr val="FFFDF7"/>
-                </a:solidFill>
-                <a:latin typeface="Karla"/>
-              </a:rPr>
-              <a:t>EVIDENCE</a:t>
             </a:r>
           </a:p>
         </p:txBody>
@@ -8007,11 +7897,11 @@
               </a:spcAft>
             </a:pPr>
             <a:r>
-              <a:rPr sz="2600" b="1" i="0">
+              <a:rPr sz="2600" b="0" i="0">
                 <a:solidFill>
                   <a:srgbClr val="262422"/>
                 </a:solidFill>
-                <a:latin typeface="Libre Caslon Display"/>
+                <a:latin typeface="Georgia"/>
               </a:rPr>
               <a:t>Lung cancer deaths among doctors</a:t>
             </a:r>
@@ -8160,7 +8050,7 @@
                 <a:solidFill>
                   <a:srgbClr val="56524B"/>
                 </a:solidFill>
-                <a:latin typeface="Karla"/>
+                <a:latin typeface="Calibri"/>
               </a:rPr>
               <a:t>Deaths per 1,000 doctors a year</a:t>
             </a:r>
@@ -8247,7 +8137,7 @@
                 <a:solidFill>
                   <a:srgbClr val="AD2E3C"/>
                 </a:solidFill>
-                <a:latin typeface="Karla"/>
+                <a:latin typeface="Calibri"/>
               </a:rPr>
               <a:t>WHERE THIS COMES FROM</a:t>
             </a:r>
@@ -8290,7 +8180,7 @@
                 <a:solidFill>
                   <a:srgbClr val="262422"/>
                 </a:solidFill>
-                <a:latin typeface="Karla"/>
+                <a:latin typeface="Calibri"/>
               </a:rPr>
               <a:t>From a study that followed about 40,000 British doctors from 1951. Figures for male doctors, 1951 to 1961. Doll and Hill, British Medical Journal, 1964.</a:t>
             </a:r>
@@ -8329,11 +8219,11 @@
               </a:spcAft>
             </a:pPr>
             <a:r>
-              <a:rPr sz="1500" b="1" i="0">
+              <a:rPr sz="1500" b="0" i="0">
                 <a:solidFill>
                   <a:srgbClr val="AD2E3C"/>
                 </a:solidFill>
-                <a:latin typeface="Libre Caslon Display"/>
+                <a:latin typeface="Georgia"/>
               </a:rPr>
               <a:t>What happens to the bars as the number of cigarettes goes up?</a:t>
             </a:r>
@@ -8401,7 +8291,7 @@
                 <a:solidFill>
                   <a:srgbClr val="8C877D"/>
                 </a:solidFill>
-                <a:latin typeface="Karla"/>
+                <a:latin typeface="Calibri"/>
               </a:rPr>
               <a:t>The Pastoral Guide</a:t>
             </a:r>
@@ -8444,7 +8334,7 @@
                 <a:solidFill>
                   <a:srgbClr val="8C877D"/>
                 </a:solidFill>
-                <a:latin typeface="Karla"/>
+                <a:latin typeface="Calibri"/>
               </a:rPr>
               <a:t>13 / 23</a:t>
             </a:r>
@@ -8549,7 +8439,7 @@
                 <a:solidFill>
                   <a:srgbClr val="AD2E3C"/>
                 </a:solidFill>
-                <a:latin typeface="Karla"/>
+                <a:latin typeface="Calibri"/>
               </a:rPr>
               <a:t>BUSTED  ·  WEDNESDAY  ·  STORY 3 OF 5</a:t>
             </a:r>
@@ -8588,11 +8478,11 @@
               </a:spcAft>
             </a:pPr>
             <a:r>
-              <a:rPr sz="2800" b="1" i="0">
+              <a:rPr sz="2800" b="0" i="0">
                 <a:solidFill>
                   <a:srgbClr val="262422"/>
                 </a:solidFill>
-                <a:latin typeface="Libre Caslon Display"/>
+                <a:latin typeface="Georgia"/>
               </a:rPr>
               <a:t>What really happened</a:t>
             </a:r>
@@ -8693,7 +8583,7 @@
                 <a:solidFill>
                   <a:srgbClr val="AD2E3C"/>
                 </a:solidFill>
-                <a:latin typeface="Karla"/>
+                <a:latin typeface="Calibri"/>
               </a:rPr>
               <a:t>BUSTED</a:t>
             </a:r>
@@ -8780,7 +8670,7 @@
                 <a:solidFill>
                   <a:srgbClr val="FFFDF7"/>
                 </a:solidFill>
-                <a:latin typeface="Karla"/>
+                <a:latin typeface="Calibri"/>
               </a:rPr>
               <a:t>1</a:t>
             </a:r>
@@ -8823,7 +8713,7 @@
                 <a:solidFill>
                   <a:srgbClr val="262422"/>
                 </a:solidFill>
-                <a:latin typeface="Karla"/>
+                <a:latin typeface="Calibri"/>
               </a:rPr>
               <a:t>The company never explained how its survey was done. One account says doctors were given a free carton of Camels before being asked which brand they smoked.</a:t>
             </a:r>
@@ -8910,7 +8800,7 @@
                 <a:solidFill>
                   <a:srgbClr val="FFFDF7"/>
                 </a:solidFill>
-                <a:latin typeface="Karla"/>
+                <a:latin typeface="Calibri"/>
               </a:rPr>
               <a:t>2</a:t>
             </a:r>
@@ -8953,7 +8843,7 @@
                 <a:solidFill>
                   <a:srgbClr val="262422"/>
                 </a:solidFill>
-                <a:latin typeface="Karla"/>
+                <a:latin typeface="Calibri"/>
               </a:rPr>
               <a:t>In 1950, two British scientists, Richard Doll and Austin Bradford Hill, found a strong link between smoking and lung cancer. Doll gave up smoking.</a:t>
             </a:r>
@@ -9040,7 +8930,7 @@
                 <a:solidFill>
                   <a:srgbClr val="FFFDF7"/>
                 </a:solidFill>
-                <a:latin typeface="Karla"/>
+                <a:latin typeface="Calibri"/>
               </a:rPr>
               <a:t>3</a:t>
             </a:r>
@@ -9083,7 +8973,7 @@
                 <a:solidFill>
                   <a:srgbClr val="262422"/>
                 </a:solidFill>
-                <a:latin typeface="Karla"/>
+                <a:latin typeface="Calibri"/>
               </a:rPr>
               <a:t>Their study of doctors found that the heaviest smokers died of lung cancer about 32 times as often as doctors who did not smoke.</a:t>
             </a:r>
@@ -9170,7 +9060,7 @@
                 <a:solidFill>
                   <a:srgbClr val="EBC4C6"/>
                 </a:solidFill>
-                <a:latin typeface="Karla"/>
+                <a:latin typeface="Calibri"/>
               </a:rPr>
               <a:t>THE QUESTION THAT WOULD HAVE CAUGHT IT</a:t>
             </a:r>
@@ -9209,11 +9099,11 @@
               </a:spcAft>
             </a:pPr>
             <a:r>
-              <a:rPr sz="1800" b="1" i="0">
+              <a:rPr sz="1800" b="0" i="0">
                 <a:solidFill>
                   <a:srgbClr val="FFFDF7"/>
                 </a:solidFill>
-                <a:latin typeface="Libre Caslon Display"/>
+                <a:latin typeface="Georgia"/>
               </a:rPr>
               <a:t>What is the evidence?</a:t>
             </a:r>
@@ -9281,7 +9171,7 @@
                 <a:solidFill>
                   <a:srgbClr val="8C877D"/>
                 </a:solidFill>
-                <a:latin typeface="Karla"/>
+                <a:latin typeface="Calibri"/>
               </a:rPr>
               <a:t>The Pastoral Guide</a:t>
             </a:r>
@@ -9324,7 +9214,7 @@
                 <a:solidFill>
                   <a:srgbClr val="8C877D"/>
                 </a:solidFill>
-                <a:latin typeface="Karla"/>
+                <a:latin typeface="Calibri"/>
               </a:rPr>
               <a:t>14 / 23</a:t>
             </a:r>
@@ -9429,7 +9319,7 @@
                 <a:solidFill>
                   <a:srgbClr val="AD2E3C"/>
                 </a:solidFill>
-                <a:latin typeface="Karla"/>
+                <a:latin typeface="Calibri"/>
               </a:rPr>
               <a:t>BUSTED  ·  THURSDAY</a:t>
             </a:r>
@@ -9472,7 +9362,7 @@
                 <a:solidFill>
                   <a:srgbClr val="8C877D"/>
                 </a:solidFill>
-                <a:latin typeface="Karla"/>
+                <a:latin typeface="Calibri"/>
               </a:rPr>
               <a:t>A recreated front page</a:t>
             </a:r>
@@ -9555,11 +9445,11 @@
               </a:spcAft>
             </a:pPr>
             <a:r>
-              <a:rPr sz="3000" b="1" i="0">
+              <a:rPr sz="3000" b="0" i="0">
                 <a:solidFill>
                   <a:srgbClr val="262422"/>
                 </a:solidFill>
-                <a:latin typeface="Libre Caslon Display"/>
+                <a:latin typeface="Georgia"/>
               </a:rPr>
               <a:t>The Daily Claim</a:t>
             </a:r>
@@ -9646,7 +9536,7 @@
                 <a:solidFill>
                   <a:srgbClr val="56524B"/>
                 </a:solidFill>
-                <a:latin typeface="Karla"/>
+                <a:latin typeface="Calibri"/>
               </a:rPr>
               <a:t>WASHINGTON, 1926</a:t>
             </a:r>
@@ -9689,7 +9579,7 @@
                 <a:solidFill>
                   <a:srgbClr val="56524B"/>
                 </a:solidFill>
-                <a:latin typeface="Karla"/>
+                <a:latin typeface="Calibri"/>
               </a:rPr>
               <a:t>VOLUME ONE</a:t>
             </a:r>
@@ -9732,7 +9622,7 @@
                 <a:solidFill>
                   <a:srgbClr val="56524B"/>
                 </a:solidFill>
-                <a:latin typeface="Karla"/>
+                <a:latin typeface="Calibri"/>
               </a:rPr>
               <a:t>STORY 4 OF 5</a:t>
             </a:r>
@@ -9815,11 +9705,11 @@
               </a:spcAft>
             </a:pPr>
             <a:r>
-              <a:rPr sz="2800" b="1" i="0">
+              <a:rPr sz="2800" b="0" i="0">
                 <a:solidFill>
                   <a:srgbClr val="262422"/>
                 </a:solidFill>
-                <a:latin typeface="Libre Caslon Display"/>
+                <a:latin typeface="Georgia"/>
               </a:rPr>
               <a:t>LEADED PETROL: ‘NO REAL</a:t>
             </a:r>
@@ -9827,11 +9717,11 @@
               <a:rPr lang="en-GB"/>
             </a:br>
             <a:r>
-              <a:rPr sz="2800" b="1" i="0">
+              <a:rPr sz="2800" b="0" i="0">
                 <a:solidFill>
                   <a:srgbClr val="262422"/>
                 </a:solidFill>
-                <a:latin typeface="Libre Caslon Display"/>
+                <a:latin typeface="Georgia"/>
               </a:rPr>
               <a:t>EVIDENCE’ OF DANGER</a:t>
             </a:r>
@@ -10219,11 +10109,11 @@
               </a:spcAft>
             </a:pPr>
             <a:r>
-              <a:rPr sz="1500" b="1" i="0">
+              <a:rPr sz="1500" b="0" i="0">
                 <a:solidFill>
                   <a:srgbClr val="AD2E3C"/>
                 </a:solidFill>
-                <a:latin typeface="Libre Caslon Display"/>
+                <a:latin typeface="Georgia"/>
               </a:rPr>
               <a:t>There is “no real evidence” that the new fuel harms the public.</a:t>
             </a:r>
@@ -10266,7 +10156,7 @@
                 <a:solidFill>
                   <a:srgbClr val="56524B"/>
                 </a:solidFill>
-                <a:latin typeface="Karla"/>
+                <a:latin typeface="Calibri"/>
               </a:rPr>
               <a:t>WHAT THE COMMITTEE FOUND, 1926</a:t>
             </a:r>
@@ -10334,7 +10224,7 @@
                 <a:solidFill>
                   <a:srgbClr val="8C877D"/>
                 </a:solidFill>
-                <a:latin typeface="Karla"/>
+                <a:latin typeface="Calibri"/>
               </a:rPr>
               <a:t>The Pastoral Guide</a:t>
             </a:r>
@@ -10377,7 +10267,7 @@
                 <a:solidFill>
                   <a:srgbClr val="8C877D"/>
                 </a:solidFill>
-                <a:latin typeface="Karla"/>
+                <a:latin typeface="Calibri"/>
               </a:rPr>
               <a:t>15 / 23</a:t>
             </a:r>
@@ -10482,64 +10372,9 @@
                 <a:solidFill>
                   <a:srgbClr val="AD2E3C"/>
                 </a:solidFill>
-                <a:latin typeface="Karla"/>
+                <a:latin typeface="Calibri"/>
               </a:rPr>
               <a:t>BUSTED  ·  THURSDAY  ·  STORY 4 OF 5</a:t>
-            </a:r>
-          </a:p>
-        </p:txBody>
-      </p:sp>
-      <p:sp>
-        <p:nvSpPr>
-          <p:cNvPr id="4" name="Rounded Rectangle 3"/>
-          <p:cNvSpPr/>
-          <p:nvPr/>
-        </p:nvSpPr>
-        <p:spPr>
-          <a:xfrm>
-            <a:off x="7640472" y="246888"/>
-            <a:ext cx="817727" cy="237744"/>
-          </a:xfrm>
-          <a:prstGeom prst="roundRect">
-            <a:avLst>
-              <a:gd name="adj" fmla="val 50000"/>
-            </a:avLst>
-          </a:prstGeom>
-          <a:solidFill>
-            <a:srgbClr val="AD2E3C"/>
-          </a:solidFill>
-          <a:ln>
-            <a:noFill/>
-          </a:ln>
-          <a:effectLst/>
-        </p:spPr>
-        <p:style>
-          <a:lnRef idx="1">
-            <a:schemeClr val="accent1"/>
-          </a:lnRef>
-          <a:fillRef idx="3">
-            <a:schemeClr val="accent1"/>
-          </a:fillRef>
-          <a:effectRef idx="0">
-            <a:schemeClr val="accent1"/>
-          </a:effectRef>
-          <a:fontRef idx="minor">
-            <a:schemeClr val="lt1"/>
-          </a:fontRef>
-        </p:style>
-        <p:txBody>
-          <a:bodyPr rtlCol="0" anchor="ctr" wrap="none" lIns="0" rIns="0" tIns="0" bIns="0"/>
-          <a:lstStyle/>
-          <a:p>
-            <a:pPr algn="ctr"/>
-            <a:r>
-              <a:rPr sz="950" b="1" spc="90">
-                <a:solidFill>
-                  <a:srgbClr val="FFFDF7"/>
-                </a:solidFill>
-                <a:latin typeface="Karla"/>
-              </a:rPr>
-              <a:t>ARGUE</a:t>
             </a:r>
           </a:p>
         </p:txBody>
@@ -10580,7 +10415,7 @@
                 <a:solidFill>
                   <a:srgbClr val="56524B"/>
                 </a:solidFill>
-                <a:latin typeface="Karla"/>
+                <a:latin typeface="Calibri"/>
               </a:rPr>
               <a:t>THE CLAIM</a:t>
             </a:r>
@@ -10713,11 +10548,11 @@
               </a:spcAft>
             </a:pPr>
             <a:r>
-              <a:rPr sz="2400" b="1" i="0">
+              <a:rPr sz="2400" b="0" i="0">
                 <a:solidFill>
                   <a:srgbClr val="AD2E3C"/>
                 </a:solidFill>
-                <a:latin typeface="Libre Caslon Display"/>
+                <a:latin typeface="Georgia"/>
               </a:rPr>
               <a:t>“If nobody has proved something is harmful, it must be safe.”</a:t>
             </a:r>
@@ -10760,7 +10595,7 @@
                 <a:solidFill>
                   <a:srgbClr val="262422"/>
                 </a:solidFill>
-                <a:latin typeface="Karla"/>
+                <a:latin typeface="Calibri"/>
               </a:rPr>
               <a:t>Hands up for agree, then for disagree, then two or three people say why.</a:t>
             </a:r>
@@ -10912,11 +10747,11 @@
               </a:spcAft>
             </a:pPr>
             <a:r>
-              <a:rPr sz="1400" b="1" i="0">
+              <a:rPr sz="1400" b="0" i="0">
                 <a:solidFill>
                   <a:srgbClr val="262422"/>
                 </a:solidFill>
-                <a:latin typeface="Libre Caslon Display"/>
+                <a:latin typeface="Georgia"/>
               </a:rPr>
               <a:t>Who is saying it?</a:t>
             </a:r>
@@ -11068,11 +10903,11 @@
               </a:spcAft>
             </a:pPr>
             <a:r>
-              <a:rPr sz="1400" b="1" i="0">
+              <a:rPr sz="1400" b="0" i="0">
                 <a:solidFill>
                   <a:srgbClr val="262422"/>
                 </a:solidFill>
-                <a:latin typeface="Libre Caslon Display"/>
+                <a:latin typeface="Georgia"/>
               </a:rPr>
               <a:t>Who gains if you believe it?</a:t>
             </a:r>
@@ -11224,11 +11059,11 @@
               </a:spcAft>
             </a:pPr>
             <a:r>
-              <a:rPr sz="1400" b="1" i="0">
+              <a:rPr sz="1400" b="0" i="0">
                 <a:solidFill>
                   <a:srgbClr val="262422"/>
                 </a:solidFill>
-                <a:latin typeface="Libre Caslon Display"/>
+                <a:latin typeface="Georgia"/>
               </a:rPr>
               <a:t>What would you need to see first?</a:t>
             </a:r>
@@ -11296,7 +11131,7 @@
                 <a:solidFill>
                   <a:srgbClr val="8C877D"/>
                 </a:solidFill>
-                <a:latin typeface="Karla"/>
+                <a:latin typeface="Calibri"/>
               </a:rPr>
               <a:t>The Pastoral Guide</a:t>
             </a:r>
@@ -11339,7 +11174,7 @@
                 <a:solidFill>
                   <a:srgbClr val="8C877D"/>
                 </a:solidFill>
-                <a:latin typeface="Karla"/>
+                <a:latin typeface="Calibri"/>
               </a:rPr>
               <a:t>16 / 23</a:t>
             </a:r>
@@ -11444,64 +11279,9 @@
                 <a:solidFill>
                   <a:srgbClr val="AD2E3C"/>
                 </a:solidFill>
-                <a:latin typeface="Karla"/>
+                <a:latin typeface="Calibri"/>
               </a:rPr>
               <a:t>BUSTED  ·  THURSDAY  ·  STORY 4 OF 5</a:t>
-            </a:r>
-          </a:p>
-        </p:txBody>
-      </p:sp>
-      <p:sp>
-        <p:nvSpPr>
-          <p:cNvPr id="4" name="Rounded Rectangle 3"/>
-          <p:cNvSpPr/>
-          <p:nvPr/>
-        </p:nvSpPr>
-        <p:spPr>
-          <a:xfrm>
-            <a:off x="7406333" y="246888"/>
-            <a:ext cx="1051866" cy="237744"/>
-          </a:xfrm>
-          <a:prstGeom prst="roundRect">
-            <a:avLst>
-              <a:gd name="adj" fmla="val 50000"/>
-            </a:avLst>
-          </a:prstGeom>
-          <a:solidFill>
-            <a:srgbClr val="AD2E3C"/>
-          </a:solidFill>
-          <a:ln>
-            <a:noFill/>
-          </a:ln>
-          <a:effectLst/>
-        </p:spPr>
-        <p:style>
-          <a:lnRef idx="1">
-            <a:schemeClr val="accent1"/>
-          </a:lnRef>
-          <a:fillRef idx="3">
-            <a:schemeClr val="accent1"/>
-          </a:fillRef>
-          <a:effectRef idx="0">
-            <a:schemeClr val="accent1"/>
-          </a:effectRef>
-          <a:fontRef idx="minor">
-            <a:schemeClr val="lt1"/>
-          </a:fontRef>
-        </p:style>
-        <p:txBody>
-          <a:bodyPr rtlCol="0" anchor="ctr" wrap="none" lIns="0" rIns="0" tIns="0" bIns="0"/>
-          <a:lstStyle/>
-          <a:p>
-            <a:pPr algn="ctr"/>
-            <a:r>
-              <a:rPr sz="950" b="1" spc="90">
-                <a:solidFill>
-                  <a:srgbClr val="FFFDF7"/>
-                </a:solidFill>
-                <a:latin typeface="Karla"/>
-              </a:rPr>
-              <a:t>EVIDENCE</a:t>
             </a:r>
           </a:p>
         </p:txBody>
@@ -11538,11 +11318,11 @@
               </a:spcAft>
             </a:pPr>
             <a:r>
-              <a:rPr sz="2600" b="1" i="0">
+              <a:rPr sz="2600" b="0" i="0">
                 <a:solidFill>
                   <a:srgbClr val="262422"/>
                 </a:solidFill>
-                <a:latin typeface="Libre Caslon Display"/>
+                <a:latin typeface="Georgia"/>
               </a:rPr>
               <a:t>Lead in young children’s blood, US</a:t>
             </a:r>
@@ -11691,7 +11471,7 @@
                 <a:solidFill>
                   <a:srgbClr val="56524B"/>
                 </a:solidFill>
-                <a:latin typeface="Karla"/>
+                <a:latin typeface="Calibri"/>
               </a:rPr>
               <a:t>Micrograms of lead per decilitre of blood, children aged 1 to 5</a:t>
             </a:r>
@@ -11778,7 +11558,7 @@
                 <a:solidFill>
                   <a:srgbClr val="AD2E3C"/>
                 </a:solidFill>
-                <a:latin typeface="Karla"/>
+                <a:latin typeface="Calibri"/>
               </a:rPr>
               <a:t>WHERE THIS COMES FROM</a:t>
             </a:r>
@@ -11821,7 +11601,7 @@
                 <a:solidFill>
                   <a:srgbClr val="262422"/>
                 </a:solidFill>
-                <a:latin typeface="Karla"/>
+                <a:latin typeface="Calibri"/>
               </a:rPr>
               <a:t>The US took lead out of petrol from 1975 and banned it for cars in 1996. Lead paint and lead solder were also banned. Egan and others, 2021; US Environmental Protection Agency.</a:t>
             </a:r>
@@ -11860,11 +11640,11 @@
               </a:spcAft>
             </a:pPr>
             <a:r>
-              <a:rPr sz="1500" b="1" i="0">
+              <a:rPr sz="1500" b="0" i="0">
                 <a:solidFill>
                   <a:srgbClr val="AD2E3C"/>
                 </a:solidFill>
-                <a:latin typeface="Libre Caslon Display"/>
+                <a:latin typeface="Georgia"/>
               </a:rPr>
               <a:t>What happened to the lead, and what else might explain it?</a:t>
             </a:r>
@@ -11932,7 +11712,7 @@
                 <a:solidFill>
                   <a:srgbClr val="8C877D"/>
                 </a:solidFill>
-                <a:latin typeface="Karla"/>
+                <a:latin typeface="Calibri"/>
               </a:rPr>
               <a:t>The Pastoral Guide</a:t>
             </a:r>
@@ -11975,7 +11755,7 @@
                 <a:solidFill>
                   <a:srgbClr val="8C877D"/>
                 </a:solidFill>
-                <a:latin typeface="Karla"/>
+                <a:latin typeface="Calibri"/>
               </a:rPr>
               <a:t>17 / 23</a:t>
             </a:r>
@@ -12080,7 +11860,7 @@
                 <a:solidFill>
                   <a:srgbClr val="AD2E3C"/>
                 </a:solidFill>
-                <a:latin typeface="Karla"/>
+                <a:latin typeface="Calibri"/>
               </a:rPr>
               <a:t>BUSTED  ·  THURSDAY  ·  STORY 4 OF 5</a:t>
             </a:r>
@@ -12119,11 +11899,11 @@
               </a:spcAft>
             </a:pPr>
             <a:r>
-              <a:rPr sz="2800" b="1" i="0">
+              <a:rPr sz="2800" b="0" i="0">
                 <a:solidFill>
                   <a:srgbClr val="262422"/>
                 </a:solidFill>
-                <a:latin typeface="Libre Caslon Display"/>
+                <a:latin typeface="Georgia"/>
               </a:rPr>
               <a:t>What really happened</a:t>
             </a:r>
@@ -12224,7 +12004,7 @@
                 <a:solidFill>
                   <a:srgbClr val="AD2E3C"/>
                 </a:solidFill>
-                <a:latin typeface="Karla"/>
+                <a:latin typeface="Calibri"/>
               </a:rPr>
               <a:t>BUSTED</a:t>
             </a:r>
@@ -12311,7 +12091,7 @@
                 <a:solidFill>
                   <a:srgbClr val="FFFDF7"/>
                 </a:solidFill>
-                <a:latin typeface="Karla"/>
+                <a:latin typeface="Calibri"/>
               </a:rPr>
               <a:t>1</a:t>
             </a:r>
@@ -12354,7 +12134,7 @@
                 <a:solidFill>
                   <a:srgbClr val="262422"/>
                 </a:solidFill>
-                <a:latin typeface="Karla"/>
+                <a:latin typeface="Calibri"/>
               </a:rPr>
               <a:t>The scientist Clair Patterson showed that lead levels in people and in the environment were far higher than they had been before leaded petrol.</a:t>
             </a:r>
@@ -12441,7 +12221,7 @@
                 <a:solidFill>
                   <a:srgbClr val="FFFDF7"/>
                 </a:solidFill>
-                <a:latin typeface="Karla"/>
+                <a:latin typeface="Calibri"/>
               </a:rPr>
               <a:t>2</a:t>
             </a:r>
@@ -12484,7 +12264,7 @@
                 <a:solidFill>
                   <a:srgbClr val="262422"/>
                 </a:solidFill>
-                <a:latin typeface="Karla"/>
+                <a:latin typeface="Calibri"/>
               </a:rPr>
               <a:t>The leading expert who said leaded fuel was no threat, Robert Kehoe, was paid by the industry. Lead harms the developing brain, and there is no safe level.</a:t>
             </a:r>
@@ -12571,7 +12351,7 @@
                 <a:solidFill>
                   <a:srgbClr val="FFFDF7"/>
                 </a:solidFill>
-                <a:latin typeface="Karla"/>
+                <a:latin typeface="Calibri"/>
               </a:rPr>
               <a:t>3</a:t>
             </a:r>
@@ -12614,7 +12394,7 @@
                 <a:solidFill>
                   <a:srgbClr val="262422"/>
                 </a:solidFill>
-                <a:latin typeface="Karla"/>
+                <a:latin typeface="Calibri"/>
               </a:rPr>
               <a:t>The UK banned leaded petrol in 2000. The last country stopped selling it in 2021.</a:t>
             </a:r>
@@ -12701,7 +12481,7 @@
                 <a:solidFill>
                   <a:srgbClr val="EBC4C6"/>
                 </a:solidFill>
-                <a:latin typeface="Karla"/>
+                <a:latin typeface="Calibri"/>
               </a:rPr>
               <a:t>THE QUESTION THAT WOULD HAVE CAUGHT IT</a:t>
             </a:r>
@@ -12740,11 +12520,11 @@
               </a:spcAft>
             </a:pPr>
             <a:r>
-              <a:rPr sz="1800" b="1" i="0">
+              <a:rPr sz="1800" b="0" i="0">
                 <a:solidFill>
                   <a:srgbClr val="FFFDF7"/>
                 </a:solidFill>
-                <a:latin typeface="Libre Caslon Display"/>
+                <a:latin typeface="Georgia"/>
               </a:rPr>
               <a:t>Has it been tested, and by whom?</a:t>
             </a:r>
@@ -12812,7 +12592,7 @@
                 <a:solidFill>
                   <a:srgbClr val="8C877D"/>
                 </a:solidFill>
-                <a:latin typeface="Karla"/>
+                <a:latin typeface="Calibri"/>
               </a:rPr>
               <a:t>The Pastoral Guide</a:t>
             </a:r>
@@ -12855,7 +12635,7 @@
                 <a:solidFill>
                   <a:srgbClr val="8C877D"/>
                 </a:solidFill>
-                <a:latin typeface="Karla"/>
+                <a:latin typeface="Calibri"/>
               </a:rPr>
               <a:t>18 / 23</a:t>
             </a:r>
@@ -12960,7 +12740,7 @@
                 <a:solidFill>
                   <a:srgbClr val="AD2E3C"/>
                 </a:solidFill>
-                <a:latin typeface="Karla"/>
+                <a:latin typeface="Calibri"/>
               </a:rPr>
               <a:t>BUSTED  ·  FRIDAY</a:t>
             </a:r>
@@ -13003,7 +12783,7 @@
                 <a:solidFill>
                   <a:srgbClr val="8C877D"/>
                 </a:solidFill>
-                <a:latin typeface="Karla"/>
+                <a:latin typeface="Calibri"/>
               </a:rPr>
               <a:t>A recreated front page</a:t>
             </a:r>
@@ -13086,11 +12866,11 @@
               </a:spcAft>
             </a:pPr>
             <a:r>
-              <a:rPr sz="3000" b="1" i="0">
+              <a:rPr sz="3000" b="0" i="0">
                 <a:solidFill>
                   <a:srgbClr val="262422"/>
                 </a:solidFill>
-                <a:latin typeface="Libre Caslon Display"/>
+                <a:latin typeface="Georgia"/>
               </a:rPr>
               <a:t>The Daily Claim</a:t>
             </a:r>
@@ -13177,7 +12957,7 @@
                 <a:solidFill>
                   <a:srgbClr val="56524B"/>
                 </a:solidFill>
-                <a:latin typeface="Karla"/>
+                <a:latin typeface="Calibri"/>
               </a:rPr>
               <a:t>CINCINNATI, 1912</a:t>
             </a:r>
@@ -13220,7 +13000,7 @@
                 <a:solidFill>
                   <a:srgbClr val="56524B"/>
                 </a:solidFill>
-                <a:latin typeface="Karla"/>
+                <a:latin typeface="Calibri"/>
               </a:rPr>
               <a:t>VOLUME ONE</a:t>
             </a:r>
@@ -13263,7 +13043,7 @@
                 <a:solidFill>
                   <a:srgbClr val="56524B"/>
                 </a:solidFill>
-                <a:latin typeface="Karla"/>
+                <a:latin typeface="Calibri"/>
               </a:rPr>
               <a:t>STORY 5 OF 5</a:t>
             </a:r>
@@ -13346,11 +13126,11 @@
               </a:spcAft>
             </a:pPr>
             <a:r>
-              <a:rPr sz="2800" b="1" i="0">
+              <a:rPr sz="2800" b="0" i="0">
                 <a:solidFill>
                   <a:srgbClr val="262422"/>
                 </a:solidFill>
-                <a:latin typeface="Libre Caslon Display"/>
+                <a:latin typeface="Georgia"/>
               </a:rPr>
               <a:t>IT’S ALL VEGETABLE!</a:t>
             </a:r>
@@ -13358,11 +13138,11 @@
               <a:rPr lang="en-GB"/>
             </a:br>
             <a:r>
-              <a:rPr sz="2800" b="1" i="0">
+              <a:rPr sz="2800" b="0" i="0">
                 <a:solidFill>
                   <a:srgbClr val="262422"/>
                 </a:solidFill>
-                <a:latin typeface="Libre Caslon Display"/>
+                <a:latin typeface="Georgia"/>
               </a:rPr>
               <a:t>IT’S DIGESTIBLE!</a:t>
             </a:r>
@@ -13750,11 +13530,11 @@
               </a:spcAft>
             </a:pPr>
             <a:r>
-              <a:rPr sz="1500" b="1" i="0">
+              <a:rPr sz="1500" b="0" i="0">
                 <a:solidFill>
                   <a:srgbClr val="AD2E3C"/>
                 </a:solidFill>
-                <a:latin typeface="Libre Caslon Display"/>
+                <a:latin typeface="Georgia"/>
               </a:rPr>
               <a:t>Healthier and more cost-effective than butter and other fats.</a:t>
             </a:r>
@@ -13797,7 +13577,7 @@
                 <a:solidFill>
                   <a:srgbClr val="56524B"/>
                 </a:solidFill>
-                <a:latin typeface="Karla"/>
+                <a:latin typeface="Calibri"/>
               </a:rPr>
               <a:t>HOW CRISCO WAS ADVERTISED</a:t>
             </a:r>
@@ -13865,7 +13645,7 @@
                 <a:solidFill>
                   <a:srgbClr val="8C877D"/>
                 </a:solidFill>
-                <a:latin typeface="Karla"/>
+                <a:latin typeface="Calibri"/>
               </a:rPr>
               <a:t>The Pastoral Guide</a:t>
             </a:r>
@@ -13908,7 +13688,7 @@
                 <a:solidFill>
                   <a:srgbClr val="8C877D"/>
                 </a:solidFill>
-                <a:latin typeface="Karla"/>
+                <a:latin typeface="Calibri"/>
               </a:rPr>
               <a:t>19 / 23</a:t>
             </a:r>
@@ -14013,7 +13793,7 @@
                 <a:solidFill>
                   <a:srgbClr val="AD2E3C"/>
                 </a:solidFill>
-                <a:latin typeface="Karla"/>
+                <a:latin typeface="Calibri"/>
               </a:rPr>
               <a:t>BUSTED  ·  HOW IT WORKS</a:t>
             </a:r>
@@ -14052,11 +13832,11 @@
               </a:spcAft>
             </a:pPr>
             <a:r>
-              <a:rPr sz="2800" b="1" i="0">
+              <a:rPr sz="2800" b="0" i="0">
                 <a:solidFill>
                   <a:srgbClr val="262422"/>
                 </a:solidFill>
-                <a:latin typeface="Libre Caslon Display"/>
+                <a:latin typeface="Georgia"/>
               </a:rPr>
               <a:t>One story a day, in four slides</a:t>
             </a:r>
@@ -14099,7 +13879,7 @@
                 <a:solidFill>
                   <a:srgbClr val="56524B"/>
                 </a:solidFill>
-                <a:latin typeface="Karla"/>
+                <a:latin typeface="Calibri"/>
               </a:rPr>
               <a:t>About ten minutes a morning. Nothing to print.</a:t>
             </a:r>
@@ -14295,11 +14075,11 @@
               </a:spcAft>
             </a:pPr>
             <a:r>
-              <a:rPr sz="1400" b="1" i="0">
+              <a:rPr sz="1400" b="0" i="0">
                 <a:solidFill>
                   <a:srgbClr val="262422"/>
                 </a:solidFill>
-                <a:latin typeface="Libre Caslon Display"/>
+                <a:latin typeface="Georgia"/>
               </a:rPr>
               <a:t>The front page</a:t>
             </a:r>
@@ -14342,7 +14122,7 @@
                 <a:solidFill>
                   <a:srgbClr val="56524B"/>
                 </a:solidFill>
-                <a:latin typeface="Karla"/>
+                <a:latin typeface="Calibri"/>
               </a:rPr>
               <a:t>A claim that was once reported as true.</a:t>
             </a:r>
@@ -14538,11 +14318,11 @@
               </a:spcAft>
             </a:pPr>
             <a:r>
-              <a:rPr sz="1400" b="1" i="0">
+              <a:rPr sz="1400" b="0" i="0">
                 <a:solidFill>
                   <a:srgbClr val="262422"/>
                 </a:solidFill>
-                <a:latin typeface="Libre Caslon Display"/>
+                <a:latin typeface="Georgia"/>
               </a:rPr>
               <a:t>Argue it out</a:t>
             </a:r>
@@ -14585,7 +14365,7 @@
                 <a:solidFill>
                   <a:srgbClr val="56524B"/>
                 </a:solidFill>
-                <a:latin typeface="Karla"/>
+                <a:latin typeface="Calibri"/>
               </a:rPr>
               <a:t>Do you believe it? Who is saying it, and who gains?</a:t>
             </a:r>
@@ -14781,11 +14561,11 @@
               </a:spcAft>
             </a:pPr>
             <a:r>
-              <a:rPr sz="1400" b="1" i="0">
+              <a:rPr sz="1400" b="0" i="0">
                 <a:solidFill>
                   <a:srgbClr val="262422"/>
                 </a:solidFill>
-                <a:latin typeface="Libre Caslon Display"/>
+                <a:latin typeface="Georgia"/>
               </a:rPr>
               <a:t>The evidence</a:t>
             </a:r>
@@ -14828,7 +14608,7 @@
                 <a:solidFill>
                   <a:srgbClr val="56524B"/>
                 </a:solidFill>
-                <a:latin typeface="Karla"/>
+                <a:latin typeface="Calibri"/>
               </a:rPr>
               <a:t>A graph or a document goes up. What does it show?</a:t>
             </a:r>
@@ -15024,11 +14804,11 @@
               </a:spcAft>
             </a:pPr>
             <a:r>
-              <a:rPr sz="1400" b="1" i="0">
+              <a:rPr sz="1400" b="0" i="0">
                 <a:solidFill>
                   <a:srgbClr val="262422"/>
                 </a:solidFill>
-                <a:latin typeface="Libre Caslon Display"/>
+                <a:latin typeface="Georgia"/>
               </a:rPr>
               <a:t>The verdict</a:t>
             </a:r>
@@ -15071,7 +14851,7 @@
                 <a:solidFill>
                   <a:srgbClr val="56524B"/>
                 </a:solidFill>
-                <a:latin typeface="Karla"/>
+                <a:latin typeface="Calibri"/>
               </a:rPr>
               <a:t>What really happened, and the question that would have caught it.</a:t>
             </a:r>
@@ -15139,7 +14919,7 @@
                 <a:solidFill>
                   <a:srgbClr val="8C877D"/>
                 </a:solidFill>
-                <a:latin typeface="Karla"/>
+                <a:latin typeface="Calibri"/>
               </a:rPr>
               <a:t>The Pastoral Guide</a:t>
             </a:r>
@@ -15182,7 +14962,7 @@
                 <a:solidFill>
                   <a:srgbClr val="8C877D"/>
                 </a:solidFill>
-                <a:latin typeface="Karla"/>
+                <a:latin typeface="Calibri"/>
               </a:rPr>
               <a:t>2 / 23</a:t>
             </a:r>
@@ -15287,64 +15067,9 @@
                 <a:solidFill>
                   <a:srgbClr val="AD2E3C"/>
                 </a:solidFill>
-                <a:latin typeface="Karla"/>
+                <a:latin typeface="Calibri"/>
               </a:rPr>
               <a:t>BUSTED  ·  FRIDAY  ·  STORY 5 OF 5</a:t>
-            </a:r>
-          </a:p>
-        </p:txBody>
-      </p:sp>
-      <p:sp>
-        <p:nvSpPr>
-          <p:cNvPr id="4" name="Rounded Rectangle 3"/>
-          <p:cNvSpPr/>
-          <p:nvPr/>
-        </p:nvSpPr>
-        <p:spPr>
-          <a:xfrm>
-            <a:off x="7640472" y="246888"/>
-            <a:ext cx="817727" cy="237744"/>
-          </a:xfrm>
-          <a:prstGeom prst="roundRect">
-            <a:avLst>
-              <a:gd name="adj" fmla="val 50000"/>
-            </a:avLst>
-          </a:prstGeom>
-          <a:solidFill>
-            <a:srgbClr val="AD2E3C"/>
-          </a:solidFill>
-          <a:ln>
-            <a:noFill/>
-          </a:ln>
-          <a:effectLst/>
-        </p:spPr>
-        <p:style>
-          <a:lnRef idx="1">
-            <a:schemeClr val="accent1"/>
-          </a:lnRef>
-          <a:fillRef idx="3">
-            <a:schemeClr val="accent1"/>
-          </a:fillRef>
-          <a:effectRef idx="0">
-            <a:schemeClr val="accent1"/>
-          </a:effectRef>
-          <a:fontRef idx="minor">
-            <a:schemeClr val="lt1"/>
-          </a:fontRef>
-        </p:style>
-        <p:txBody>
-          <a:bodyPr rtlCol="0" anchor="ctr" wrap="none" lIns="0" rIns="0" tIns="0" bIns="0"/>
-          <a:lstStyle/>
-          <a:p>
-            <a:pPr algn="ctr"/>
-            <a:r>
-              <a:rPr sz="950" b="1" spc="90">
-                <a:solidFill>
-                  <a:srgbClr val="FFFDF7"/>
-                </a:solidFill>
-                <a:latin typeface="Karla"/>
-              </a:rPr>
-              <a:t>ARGUE</a:t>
             </a:r>
           </a:p>
         </p:txBody>
@@ -15385,7 +15110,7 @@
                 <a:solidFill>
                   <a:srgbClr val="56524B"/>
                 </a:solidFill>
-                <a:latin typeface="Karla"/>
+                <a:latin typeface="Calibri"/>
               </a:rPr>
               <a:t>THE CLAIM</a:t>
             </a:r>
@@ -15518,11 +15243,11 @@
               </a:spcAft>
             </a:pPr>
             <a:r>
-              <a:rPr sz="2100" b="1" i="0">
+              <a:rPr sz="2100" b="0" i="0">
                 <a:solidFill>
                   <a:srgbClr val="AD2E3C"/>
                 </a:solidFill>
-                <a:latin typeface="Libre Caslon Display"/>
+                <a:latin typeface="Georgia"/>
               </a:rPr>
               <a:t>“A new food made in a factory by scientists is probably better for you than the old one.”</a:t>
             </a:r>
@@ -15565,7 +15290,7 @@
                 <a:solidFill>
                   <a:srgbClr val="262422"/>
                 </a:solidFill>
-                <a:latin typeface="Karla"/>
+                <a:latin typeface="Calibri"/>
               </a:rPr>
               <a:t>Hands up for agree, then for disagree, then two or three people say why.</a:t>
             </a:r>
@@ -15717,11 +15442,11 @@
               </a:spcAft>
             </a:pPr>
             <a:r>
-              <a:rPr sz="1400" b="1" i="0">
+              <a:rPr sz="1400" b="0" i="0">
                 <a:solidFill>
                   <a:srgbClr val="262422"/>
                 </a:solidFill>
-                <a:latin typeface="Libre Caslon Display"/>
+                <a:latin typeface="Georgia"/>
               </a:rPr>
               <a:t>Who is saying it?</a:t>
             </a:r>
@@ -15873,11 +15598,11 @@
               </a:spcAft>
             </a:pPr>
             <a:r>
-              <a:rPr sz="1400" b="1" i="0">
+              <a:rPr sz="1400" b="0" i="0">
                 <a:solidFill>
                   <a:srgbClr val="262422"/>
                 </a:solidFill>
-                <a:latin typeface="Libre Caslon Display"/>
+                <a:latin typeface="Georgia"/>
               </a:rPr>
               <a:t>Who gains if you believe it?</a:t>
             </a:r>
@@ -16029,11 +15754,11 @@
               </a:spcAft>
             </a:pPr>
             <a:r>
-              <a:rPr sz="1400" b="1" i="0">
+              <a:rPr sz="1400" b="0" i="0">
                 <a:solidFill>
                   <a:srgbClr val="262422"/>
                 </a:solidFill>
-                <a:latin typeface="Libre Caslon Display"/>
+                <a:latin typeface="Georgia"/>
               </a:rPr>
               <a:t>What would you need to see first?</a:t>
             </a:r>
@@ -16101,7 +15826,7 @@
                 <a:solidFill>
                   <a:srgbClr val="8C877D"/>
                 </a:solidFill>
-                <a:latin typeface="Karla"/>
+                <a:latin typeface="Calibri"/>
               </a:rPr>
               <a:t>The Pastoral Guide</a:t>
             </a:r>
@@ -16144,7 +15869,7 @@
                 <a:solidFill>
                   <a:srgbClr val="8C877D"/>
                 </a:solidFill>
-                <a:latin typeface="Karla"/>
+                <a:latin typeface="Calibri"/>
               </a:rPr>
               <a:t>20 / 23</a:t>
             </a:r>
@@ -16249,64 +15974,9 @@
                 <a:solidFill>
                   <a:srgbClr val="AD2E3C"/>
                 </a:solidFill>
-                <a:latin typeface="Karla"/>
+                <a:latin typeface="Calibri"/>
               </a:rPr>
               <a:t>BUSTED  ·  FRIDAY  ·  STORY 5 OF 5</a:t>
-            </a:r>
-          </a:p>
-        </p:txBody>
-      </p:sp>
-      <p:sp>
-        <p:nvSpPr>
-          <p:cNvPr id="4" name="Rounded Rectangle 3"/>
-          <p:cNvSpPr/>
-          <p:nvPr/>
-        </p:nvSpPr>
-        <p:spPr>
-          <a:xfrm>
-            <a:off x="7406333" y="246888"/>
-            <a:ext cx="1051866" cy="237744"/>
-          </a:xfrm>
-          <a:prstGeom prst="roundRect">
-            <a:avLst>
-              <a:gd name="adj" fmla="val 50000"/>
-            </a:avLst>
-          </a:prstGeom>
-          <a:solidFill>
-            <a:srgbClr val="AD2E3C"/>
-          </a:solidFill>
-          <a:ln>
-            <a:noFill/>
-          </a:ln>
-          <a:effectLst/>
-        </p:spPr>
-        <p:style>
-          <a:lnRef idx="1">
-            <a:schemeClr val="accent1"/>
-          </a:lnRef>
-          <a:fillRef idx="3">
-            <a:schemeClr val="accent1"/>
-          </a:fillRef>
-          <a:effectRef idx="0">
-            <a:schemeClr val="accent1"/>
-          </a:effectRef>
-          <a:fontRef idx="minor">
-            <a:schemeClr val="lt1"/>
-          </a:fontRef>
-        </p:style>
-        <p:txBody>
-          <a:bodyPr rtlCol="0" anchor="ctr" wrap="none" lIns="0" rIns="0" tIns="0" bIns="0"/>
-          <a:lstStyle/>
-          <a:p>
-            <a:pPr algn="ctr"/>
-            <a:r>
-              <a:rPr sz="950" b="1" spc="90">
-                <a:solidFill>
-                  <a:srgbClr val="FFFDF7"/>
-                </a:solidFill>
-                <a:latin typeface="Karla"/>
-              </a:rPr>
-              <a:t>EVIDENCE</a:t>
             </a:r>
           </a:p>
         </p:txBody>
@@ -16343,11 +16013,11 @@
               </a:spcAft>
             </a:pPr>
             <a:r>
-              <a:rPr sz="2600" b="1" i="0">
+              <a:rPr sz="2600" b="0" i="0">
                 <a:solidFill>
                   <a:srgbClr val="262422"/>
                 </a:solidFill>
-                <a:latin typeface="Libre Caslon Display"/>
+                <a:latin typeface="Georgia"/>
               </a:rPr>
               <a:t>What two fats did to cholesterol</a:t>
             </a:r>
@@ -16496,7 +16166,7 @@
                 <a:solidFill>
                   <a:srgbClr val="56524B"/>
                 </a:solidFill>
-                <a:latin typeface="Karla"/>
+                <a:latin typeface="Calibri"/>
               </a:rPr>
               <a:t>Change in mmol per litre, compared with a diet high in fat like olive oil</a:t>
             </a:r>
@@ -16583,7 +16253,7 @@
                 <a:solidFill>
                   <a:srgbClr val="AD2E3C"/>
                 </a:solidFill>
-                <a:latin typeface="Karla"/>
+                <a:latin typeface="Calibri"/>
               </a:rPr>
               <a:t>WHERE THIS COMES FROM</a:t>
             </a:r>
@@ -16626,7 +16296,7 @@
                 <a:solidFill>
                   <a:srgbClr val="262422"/>
                 </a:solidFill>
-                <a:latin typeface="Karla"/>
+                <a:latin typeface="Calibri"/>
               </a:rPr>
               <a:t>59 healthy volunteers ate each diet for three weeks. Mensink and Katan, New England Journal of Medicine, 1990.</a:t>
             </a:r>
@@ -16665,11 +16335,11 @@
               </a:spcAft>
             </a:pPr>
             <a:r>
-              <a:rPr sz="1500" b="1" i="0">
+              <a:rPr sz="1500" b="0" i="0">
                 <a:solidFill>
                   <a:srgbClr val="AD2E3C"/>
                 </a:solidFill>
-                <a:latin typeface="Libre Caslon Display"/>
+                <a:latin typeface="Georgia"/>
               </a:rPr>
               <a:t>Which fat moved both numbers the wrong way?</a:t>
             </a:r>
@@ -16737,7 +16407,7 @@
                 <a:solidFill>
                   <a:srgbClr val="8C877D"/>
                 </a:solidFill>
-                <a:latin typeface="Karla"/>
+                <a:latin typeface="Calibri"/>
               </a:rPr>
               <a:t>The Pastoral Guide</a:t>
             </a:r>
@@ -16780,7 +16450,7 @@
                 <a:solidFill>
                   <a:srgbClr val="8C877D"/>
                 </a:solidFill>
-                <a:latin typeface="Karla"/>
+                <a:latin typeface="Calibri"/>
               </a:rPr>
               <a:t>21 / 23</a:t>
             </a:r>
@@ -16885,7 +16555,7 @@
                 <a:solidFill>
                   <a:srgbClr val="AD2E3C"/>
                 </a:solidFill>
-                <a:latin typeface="Karla"/>
+                <a:latin typeface="Calibri"/>
               </a:rPr>
               <a:t>BUSTED  ·  FRIDAY  ·  STORY 5 OF 5</a:t>
             </a:r>
@@ -16924,11 +16594,11 @@
               </a:spcAft>
             </a:pPr>
             <a:r>
-              <a:rPr sz="2800" b="1" i="0">
+              <a:rPr sz="2800" b="0" i="0">
                 <a:solidFill>
                   <a:srgbClr val="262422"/>
                 </a:solidFill>
-                <a:latin typeface="Libre Caslon Display"/>
+                <a:latin typeface="Georgia"/>
               </a:rPr>
               <a:t>What really happened</a:t>
             </a:r>
@@ -17029,7 +16699,7 @@
                 <a:solidFill>
                   <a:srgbClr val="AD2E3C"/>
                 </a:solidFill>
-                <a:latin typeface="Karla"/>
+                <a:latin typeface="Calibri"/>
               </a:rPr>
               <a:t>BUSTED</a:t>
             </a:r>
@@ -17116,7 +16786,7 @@
                 <a:solidFill>
                   <a:srgbClr val="FFFDF7"/>
                 </a:solidFill>
-                <a:latin typeface="Karla"/>
+                <a:latin typeface="Calibri"/>
               </a:rPr>
               <a:t>1</a:t>
             </a:r>
@@ -17159,7 +16829,7 @@
                 <a:solidFill>
                   <a:srgbClr val="262422"/>
                 </a:solidFill>
-                <a:latin typeface="Karla"/>
+                <a:latin typeface="Calibri"/>
               </a:rPr>
               <a:t>Turning oil solid in the factory made trans fats. Trans fat raises the bad cholesterol and lowers the good kind at the same time.</a:t>
             </a:r>
@@ -17246,7 +16916,7 @@
                 <a:solidFill>
                   <a:srgbClr val="FFFDF7"/>
                 </a:solidFill>
-                <a:latin typeface="Karla"/>
+                <a:latin typeface="Calibri"/>
               </a:rPr>
               <a:t>2</a:t>
             </a:r>
@@ -17289,7 +16959,7 @@
                 <a:solidFill>
                   <a:srgbClr val="262422"/>
                 </a:solidFill>
-                <a:latin typeface="Karla"/>
+                <a:latin typeface="Calibri"/>
               </a:rPr>
               <a:t>The World Health Organization links more than 278,000 deaths a year to trans fats made in factories. The US ruled them unsafe in 2015, and Crisco changed its recipe in 2007.</a:t>
             </a:r>
@@ -17376,7 +17046,7 @@
                 <a:solidFill>
                   <a:srgbClr val="FFFDF7"/>
                 </a:solidFill>
-                <a:latin typeface="Karla"/>
+                <a:latin typeface="Calibri"/>
               </a:rPr>
               <a:t>3</a:t>
             </a:r>
@@ -17419,7 +17089,7 @@
                 <a:solidFill>
                   <a:srgbClr val="262422"/>
                 </a:solidFill>
-                <a:latin typeface="Karla"/>
+                <a:latin typeface="Calibri"/>
               </a:rPr>
               <a:t>Butter is not off the hook. Saturated fat raised the bad cholesterol too. The claim that failed was that the new factory fat was the healthy one.</a:t>
             </a:r>
@@ -17506,7 +17176,7 @@
                 <a:solidFill>
                   <a:srgbClr val="EBC4C6"/>
                 </a:solidFill>
-                <a:latin typeface="Karla"/>
+                <a:latin typeface="Calibri"/>
               </a:rPr>
               <a:t>THE QUESTION THAT WOULD HAVE CAUGHT IT</a:t>
             </a:r>
@@ -17545,11 +17215,11 @@
               </a:spcAft>
             </a:pPr>
             <a:r>
-              <a:rPr sz="1800" b="1" i="0">
+              <a:rPr sz="1800" b="0" i="0">
                 <a:solidFill>
                   <a:srgbClr val="FFFDF7"/>
                 </a:solidFill>
-                <a:latin typeface="Libre Caslon Display"/>
+                <a:latin typeface="Georgia"/>
               </a:rPr>
               <a:t>Who gains if I believe it?</a:t>
             </a:r>
@@ -17617,7 +17287,7 @@
                 <a:solidFill>
                   <a:srgbClr val="8C877D"/>
                 </a:solidFill>
-                <a:latin typeface="Karla"/>
+                <a:latin typeface="Calibri"/>
               </a:rPr>
               <a:t>The Pastoral Guide</a:t>
             </a:r>
@@ -17660,7 +17330,7 @@
                 <a:solidFill>
                   <a:srgbClr val="8C877D"/>
                 </a:solidFill>
-                <a:latin typeface="Karla"/>
+                <a:latin typeface="Calibri"/>
               </a:rPr>
               <a:t>22 / 23</a:t>
             </a:r>
@@ -17765,7 +17435,7 @@
                 <a:solidFill>
                   <a:srgbClr val="AD2E3C"/>
                 </a:solidFill>
-                <a:latin typeface="Karla"/>
+                <a:latin typeface="Calibri"/>
               </a:rPr>
               <a:t>BUSTED  ·  VOLUME ONE</a:t>
             </a:r>
@@ -17829,11 +17499,11 @@
               </a:spcAft>
             </a:pPr>
             <a:r>
-              <a:rPr sz="3000" b="1" i="0">
+              <a:rPr sz="3000" b="0" i="0">
                 <a:solidFill>
                   <a:srgbClr val="262422"/>
                 </a:solidFill>
-                <a:latin typeface="Libre Caslon Display"/>
+                <a:latin typeface="Georgia"/>
               </a:rPr>
               <a:t>All five were printed as true</a:t>
             </a:r>
@@ -17876,7 +17546,7 @@
                 <a:solidFill>
                   <a:srgbClr val="56524B"/>
                 </a:solidFill>
-                <a:latin typeface="Karla"/>
+                <a:latin typeface="Calibri"/>
               </a:rPr>
               <a:t>Next time you see a headline, ask these five questions.</a:t>
             </a:r>
@@ -18003,11 +17673,11 @@
               </a:spcAft>
             </a:pPr>
             <a:r>
-              <a:rPr sz="1200" b="1" i="0">
+              <a:rPr sz="1200" b="0" i="0">
                 <a:solidFill>
                   <a:srgbClr val="AD2E3C"/>
                 </a:solidFill>
-                <a:latin typeface="Libre Caslon Display"/>
+                <a:latin typeface="Georgia"/>
               </a:rPr>
               <a:t>Who is saying it?</a:t>
             </a:r>
@@ -18134,11 +17804,11 @@
               </a:spcAft>
             </a:pPr>
             <a:r>
-              <a:rPr sz="1200" b="1" i="0">
+              <a:rPr sz="1200" b="0" i="0">
                 <a:solidFill>
                   <a:srgbClr val="AD2E3C"/>
                 </a:solidFill>
-                <a:latin typeface="Libre Caslon Display"/>
+                <a:latin typeface="Georgia"/>
               </a:rPr>
               <a:t>Who gains if I believe it?</a:t>
             </a:r>
@@ -18265,11 +17935,11 @@
               </a:spcAft>
             </a:pPr>
             <a:r>
-              <a:rPr sz="1200" b="1" i="0">
+              <a:rPr sz="1200" b="0" i="0">
                 <a:solidFill>
                   <a:srgbClr val="AD2E3C"/>
                 </a:solidFill>
-                <a:latin typeface="Libre Caslon Display"/>
+                <a:latin typeface="Georgia"/>
               </a:rPr>
               <a:t>Who paid for it?</a:t>
             </a:r>
@@ -18396,11 +18066,11 @@
               </a:spcAft>
             </a:pPr>
             <a:r>
-              <a:rPr sz="1200" b="1" i="0">
+              <a:rPr sz="1200" b="0" i="0">
                 <a:solidFill>
                   <a:srgbClr val="AD2E3C"/>
                 </a:solidFill>
-                <a:latin typeface="Libre Caslon Display"/>
+                <a:latin typeface="Georgia"/>
               </a:rPr>
               <a:t>What is the evidence?</a:t>
             </a:r>
@@ -18527,11 +18197,11 @@
               </a:spcAft>
             </a:pPr>
             <a:r>
-              <a:rPr sz="1200" b="1" i="0">
+              <a:rPr sz="1200" b="0" i="0">
                 <a:solidFill>
                   <a:srgbClr val="AD2E3C"/>
                 </a:solidFill>
-                <a:latin typeface="Libre Caslon Display"/>
+                <a:latin typeface="Georgia"/>
               </a:rPr>
               <a:t>Has it been tested?</a:t>
             </a:r>
@@ -18574,7 +18244,7 @@
                 <a:solidFill>
                   <a:srgbClr val="8C877D"/>
                 </a:solidFill>
-                <a:latin typeface="Karla"/>
+                <a:latin typeface="Calibri"/>
               </a:rPr>
               <a:t>Volume Two is on its way to thepastoralguide.com.</a:t>
             </a:r>
@@ -18642,7 +18312,7 @@
                 <a:solidFill>
                   <a:srgbClr val="8C877D"/>
                 </a:solidFill>
-                <a:latin typeface="Karla"/>
+                <a:latin typeface="Calibri"/>
               </a:rPr>
               <a:t>The Pastoral Guide</a:t>
             </a:r>
@@ -18685,7 +18355,7 @@
                 <a:solidFill>
                   <a:srgbClr val="8C877D"/>
                 </a:solidFill>
-                <a:latin typeface="Karla"/>
+                <a:latin typeface="Calibri"/>
               </a:rPr>
               <a:t>23 / 23</a:t>
             </a:r>
@@ -18790,7 +18460,7 @@
                 <a:solidFill>
                   <a:srgbClr val="AD2E3C"/>
                 </a:solidFill>
-                <a:latin typeface="Karla"/>
+                <a:latin typeface="Calibri"/>
               </a:rPr>
               <a:t>BUSTED  ·  MONDAY</a:t>
             </a:r>
@@ -18833,7 +18503,7 @@
                 <a:solidFill>
                   <a:srgbClr val="8C877D"/>
                 </a:solidFill>
-                <a:latin typeface="Karla"/>
+                <a:latin typeface="Calibri"/>
               </a:rPr>
               <a:t>A recreated front page</a:t>
             </a:r>
@@ -18916,11 +18586,11 @@
               </a:spcAft>
             </a:pPr>
             <a:r>
-              <a:rPr sz="3000" b="1" i="0">
+              <a:rPr sz="3000" b="0" i="0">
                 <a:solidFill>
                   <a:srgbClr val="262422"/>
                 </a:solidFill>
-                <a:latin typeface="Libre Caslon Display"/>
+                <a:latin typeface="Georgia"/>
               </a:rPr>
               <a:t>The Daily Claim</a:t>
             </a:r>
@@ -19007,7 +18677,7 @@
                 <a:solidFill>
                   <a:srgbClr val="56524B"/>
                 </a:solidFill>
-                <a:latin typeface="Karla"/>
+                <a:latin typeface="Calibri"/>
               </a:rPr>
               <a:t>BOSTON, 1967</a:t>
             </a:r>
@@ -19050,7 +18720,7 @@
                 <a:solidFill>
                   <a:srgbClr val="56524B"/>
                 </a:solidFill>
-                <a:latin typeface="Karla"/>
+                <a:latin typeface="Calibri"/>
               </a:rPr>
               <a:t>VOLUME ONE</a:t>
             </a:r>
@@ -19093,7 +18763,7 @@
                 <a:solidFill>
                   <a:srgbClr val="56524B"/>
                 </a:solidFill>
-                <a:latin typeface="Karla"/>
+                <a:latin typeface="Calibri"/>
               </a:rPr>
               <a:t>STORY 1 OF 5</a:t>
             </a:r>
@@ -19176,11 +18846,11 @@
               </a:spcAft>
             </a:pPr>
             <a:r>
-              <a:rPr sz="2800" b="1" i="0">
+              <a:rPr sz="2800" b="0" i="0">
                 <a:solidFill>
                   <a:srgbClr val="262422"/>
                 </a:solidFill>
-                <a:latin typeface="Libre Caslon Display"/>
+                <a:latin typeface="Georgia"/>
               </a:rPr>
               <a:t>FAT, NOT SUGAR, IS THE</a:t>
             </a:r>
@@ -19188,11 +18858,11 @@
               <a:rPr lang="en-GB"/>
             </a:br>
             <a:r>
-              <a:rPr sz="2800" b="1" i="0">
+              <a:rPr sz="2800" b="0" i="0">
                 <a:solidFill>
                   <a:srgbClr val="262422"/>
                 </a:solidFill>
-                <a:latin typeface="Libre Caslon Display"/>
+                <a:latin typeface="Georgia"/>
               </a:rPr>
               <a:t>DANGER TO YOUR HEART</a:t>
             </a:r>
@@ -19580,11 +19250,11 @@
               </a:spcAft>
             </a:pPr>
             <a:r>
-              <a:rPr sz="1300" b="1" i="0">
+              <a:rPr sz="1300" b="0" i="0">
                 <a:solidFill>
                   <a:srgbClr val="AD2E3C"/>
                 </a:solidFill>
-                <a:latin typeface="Libre Caslon Display"/>
+                <a:latin typeface="Georgia"/>
               </a:rPr>
               <a:t>The only diet change that can prevent heart disease is cutting fat and cholesterol.</a:t>
             </a:r>
@@ -19627,7 +19297,7 @@
                 <a:solidFill>
                   <a:srgbClr val="56524B"/>
                 </a:solidFill>
-                <a:latin typeface="Karla"/>
+                <a:latin typeface="Calibri"/>
               </a:rPr>
               <a:t>WHAT THE REVIEW CONCLUDED</a:t>
             </a:r>
@@ -19695,7 +19365,7 @@
                 <a:solidFill>
                   <a:srgbClr val="8C877D"/>
                 </a:solidFill>
-                <a:latin typeface="Karla"/>
+                <a:latin typeface="Calibri"/>
               </a:rPr>
               <a:t>The Pastoral Guide</a:t>
             </a:r>
@@ -19738,7 +19408,7 @@
                 <a:solidFill>
                   <a:srgbClr val="8C877D"/>
                 </a:solidFill>
-                <a:latin typeface="Karla"/>
+                <a:latin typeface="Calibri"/>
               </a:rPr>
               <a:t>3 / 23</a:t>
             </a:r>
@@ -19843,64 +19513,9 @@
                 <a:solidFill>
                   <a:srgbClr val="AD2E3C"/>
                 </a:solidFill>
-                <a:latin typeface="Karla"/>
+                <a:latin typeface="Calibri"/>
               </a:rPr>
               <a:t>BUSTED  ·  MONDAY  ·  STORY 1 OF 5</a:t>
-            </a:r>
-          </a:p>
-        </p:txBody>
-      </p:sp>
-      <p:sp>
-        <p:nvSpPr>
-          <p:cNvPr id="4" name="Rounded Rectangle 3"/>
-          <p:cNvSpPr/>
-          <p:nvPr/>
-        </p:nvSpPr>
-        <p:spPr>
-          <a:xfrm>
-            <a:off x="7640472" y="246888"/>
-            <a:ext cx="817727" cy="237744"/>
-          </a:xfrm>
-          <a:prstGeom prst="roundRect">
-            <a:avLst>
-              <a:gd name="adj" fmla="val 50000"/>
-            </a:avLst>
-          </a:prstGeom>
-          <a:solidFill>
-            <a:srgbClr val="AD2E3C"/>
-          </a:solidFill>
-          <a:ln>
-            <a:noFill/>
-          </a:ln>
-          <a:effectLst/>
-        </p:spPr>
-        <p:style>
-          <a:lnRef idx="1">
-            <a:schemeClr val="accent1"/>
-          </a:lnRef>
-          <a:fillRef idx="3">
-            <a:schemeClr val="accent1"/>
-          </a:fillRef>
-          <a:effectRef idx="0">
-            <a:schemeClr val="accent1"/>
-          </a:effectRef>
-          <a:fontRef idx="minor">
-            <a:schemeClr val="lt1"/>
-          </a:fontRef>
-        </p:style>
-        <p:txBody>
-          <a:bodyPr rtlCol="0" anchor="ctr" wrap="none" lIns="0" rIns="0" tIns="0" bIns="0"/>
-          <a:lstStyle/>
-          <a:p>
-            <a:pPr algn="ctr"/>
-            <a:r>
-              <a:rPr sz="950" b="1" spc="90">
-                <a:solidFill>
-                  <a:srgbClr val="FFFDF7"/>
-                </a:solidFill>
-                <a:latin typeface="Karla"/>
-              </a:rPr>
-              <a:t>ARGUE</a:t>
             </a:r>
           </a:p>
         </p:txBody>
@@ -19941,7 +19556,7 @@
                 <a:solidFill>
                   <a:srgbClr val="56524B"/>
                 </a:solidFill>
-                <a:latin typeface="Karla"/>
+                <a:latin typeface="Calibri"/>
               </a:rPr>
               <a:t>THE CLAIM</a:t>
             </a:r>
@@ -20074,11 +19689,11 @@
               </a:spcAft>
             </a:pPr>
             <a:r>
-              <a:rPr sz="2400" b="1" i="0">
+              <a:rPr sz="2400" b="0" i="0">
                 <a:solidFill>
                   <a:srgbClr val="AD2E3C"/>
                 </a:solidFill>
-                <a:latin typeface="Libre Caslon Display"/>
+                <a:latin typeface="Georgia"/>
               </a:rPr>
               <a:t>“Sugar is not a problem for your heart. Fat is.”</a:t>
             </a:r>
@@ -20121,7 +19736,7 @@
                 <a:solidFill>
                   <a:srgbClr val="262422"/>
                 </a:solidFill>
-                <a:latin typeface="Karla"/>
+                <a:latin typeface="Calibri"/>
               </a:rPr>
               <a:t>Hands up for agree, then for disagree, then two or three people say why.</a:t>
             </a:r>
@@ -20273,11 +19888,11 @@
               </a:spcAft>
             </a:pPr>
             <a:r>
-              <a:rPr sz="1400" b="1" i="0">
+              <a:rPr sz="1400" b="0" i="0">
                 <a:solidFill>
                   <a:srgbClr val="262422"/>
                 </a:solidFill>
-                <a:latin typeface="Libre Caslon Display"/>
+                <a:latin typeface="Georgia"/>
               </a:rPr>
               <a:t>Who is saying it?</a:t>
             </a:r>
@@ -20429,11 +20044,11 @@
               </a:spcAft>
             </a:pPr>
             <a:r>
-              <a:rPr sz="1400" b="1" i="0">
+              <a:rPr sz="1400" b="0" i="0">
                 <a:solidFill>
                   <a:srgbClr val="262422"/>
                 </a:solidFill>
-                <a:latin typeface="Libre Caslon Display"/>
+                <a:latin typeface="Georgia"/>
               </a:rPr>
               <a:t>Who gains if you believe it?</a:t>
             </a:r>
@@ -20585,11 +20200,11 @@
               </a:spcAft>
             </a:pPr>
             <a:r>
-              <a:rPr sz="1400" b="1" i="0">
+              <a:rPr sz="1400" b="0" i="0">
                 <a:solidFill>
                   <a:srgbClr val="262422"/>
                 </a:solidFill>
-                <a:latin typeface="Libre Caslon Display"/>
+                <a:latin typeface="Georgia"/>
               </a:rPr>
               <a:t>What would you need to see first?</a:t>
             </a:r>
@@ -20657,7 +20272,7 @@
                 <a:solidFill>
                   <a:srgbClr val="8C877D"/>
                 </a:solidFill>
-                <a:latin typeface="Karla"/>
+                <a:latin typeface="Calibri"/>
               </a:rPr>
               <a:t>The Pastoral Guide</a:t>
             </a:r>
@@ -20700,7 +20315,7 @@
                 <a:solidFill>
                   <a:srgbClr val="8C877D"/>
                 </a:solidFill>
-                <a:latin typeface="Karla"/>
+                <a:latin typeface="Calibri"/>
               </a:rPr>
               <a:t>4 / 23</a:t>
             </a:r>
@@ -20805,7 +20420,7 @@
                 <a:solidFill>
                   <a:srgbClr val="AD2E3C"/>
                 </a:solidFill>
-                <a:latin typeface="Karla"/>
+                <a:latin typeface="Calibri"/>
               </a:rPr>
               <a:t>BUSTED  ·  MONDAY  ·  STORY 1 OF 5</a:t>
             </a:r>
@@ -20814,19 +20429,104 @@
       </p:sp>
       <p:sp>
         <p:nvSpPr>
-          <p:cNvPr id="4" name="Rounded Rectangle 3"/>
+          <p:cNvPr id="5" name="TextBox 4"/>
+          <p:cNvSpPr txBox="1"/>
+          <p:nvPr/>
+        </p:nvSpPr>
+        <p:spPr>
+          <a:xfrm>
+            <a:off x="685800" y="566928"/>
+            <a:ext cx="7772400" cy="406400"/>
+          </a:xfrm>
+          <a:prstGeom prst="rect">
+            <a:avLst/>
+          </a:prstGeom>
+          <a:noFill/>
+          <a:effectLst/>
+        </p:spPr>
+        <p:txBody>
+          <a:bodyPr wrap="square" anchor="t" lIns="0" rIns="0" tIns="0" bIns="0">
+            <a:spAutoFit/>
+          </a:bodyPr>
+          <a:lstStyle/>
+          <a:p>
+            <a:pPr algn="l">
+              <a:lnSpc>
+                <a:spcPct val="105000"/>
+              </a:lnSpc>
+              <a:spcAft>
+                <a:spcPts val="0"/>
+              </a:spcAft>
+            </a:pPr>
+            <a:r>
+              <a:rPr sz="2600" b="0" i="0">
+                <a:solidFill>
+                  <a:srgbClr val="262422"/>
+                </a:solidFill>
+                <a:latin typeface="Georgia"/>
+              </a:rPr>
+              <a:t>Who paid for the review?</a:t>
+            </a:r>
+          </a:p>
+        </p:txBody>
+      </p:sp>
+      <p:sp>
+        <p:nvSpPr>
+          <p:cNvPr id="6" name="Rectangle 5"/>
           <p:cNvSpPr/>
           <p:nvPr/>
         </p:nvSpPr>
         <p:spPr>
           <a:xfrm>
-            <a:off x="7406333" y="246888"/>
-            <a:ext cx="1051866" cy="237744"/>
-          </a:xfrm>
-          <a:prstGeom prst="roundRect">
-            <a:avLst>
-              <a:gd name="adj" fmla="val 50000"/>
-            </a:avLst>
+            <a:off x="685800" y="1115568"/>
+            <a:ext cx="5120640" cy="2834640"/>
+          </a:xfrm>
+          <a:prstGeom prst="rect">
+            <a:avLst/>
+          </a:prstGeom>
+          <a:solidFill>
+            <a:srgbClr val="FFFFFF"/>
+          </a:solidFill>
+          <a:ln>
+            <a:noFill/>
+          </a:ln>
+          <a:effectLst/>
+        </p:spPr>
+        <p:style>
+          <a:lnRef idx="1">
+            <a:schemeClr val="accent1"/>
+          </a:lnRef>
+          <a:fillRef idx="3">
+            <a:schemeClr val="accent1"/>
+          </a:fillRef>
+          <a:effectRef idx="0">
+            <a:schemeClr val="accent1"/>
+          </a:effectRef>
+          <a:fontRef idx="minor">
+            <a:schemeClr val="lt1"/>
+          </a:fontRef>
+        </p:style>
+        <p:txBody>
+          <a:bodyPr rtlCol="0" anchor="ctr"/>
+          <a:lstStyle/>
+          <a:p>
+            <a:pPr algn="ctr"/>
+          </a:p>
+        </p:txBody>
+      </p:sp>
+      <p:sp>
+        <p:nvSpPr>
+          <p:cNvPr id="7" name="Rectangle 6"/>
+          <p:cNvSpPr/>
+          <p:nvPr/>
+        </p:nvSpPr>
+        <p:spPr>
+          <a:xfrm>
+            <a:off x="685800" y="1115568"/>
+            <a:ext cx="5120640" cy="45720"/>
+          </a:xfrm>
+          <a:prstGeom prst="rect">
+            <a:avLst/>
           </a:prstGeom>
           <a:solidFill>
             <a:srgbClr val="AD2E3C"/>
@@ -20851,81 +20551,29 @@
           </a:fontRef>
         </p:style>
         <p:txBody>
-          <a:bodyPr rtlCol="0" anchor="ctr" wrap="none" lIns="0" rIns="0" tIns="0" bIns="0"/>
+          <a:bodyPr rtlCol="0" anchor="ctr"/>
           <a:lstStyle/>
           <a:p>
             <a:pPr algn="ctr"/>
-            <a:r>
-              <a:rPr sz="950" b="1" spc="90">
-                <a:solidFill>
-                  <a:srgbClr val="FFFDF7"/>
-                </a:solidFill>
-                <a:latin typeface="Karla"/>
-              </a:rPr>
-              <a:t>EVIDENCE</a:t>
-            </a:r>
-          </a:p>
-        </p:txBody>
-      </p:sp>
-      <p:sp>
-        <p:nvSpPr>
-          <p:cNvPr id="5" name="TextBox 4"/>
-          <p:cNvSpPr txBox="1"/>
-          <p:nvPr/>
-        </p:nvSpPr>
-        <p:spPr>
-          <a:xfrm>
-            <a:off x="685800" y="566928"/>
-            <a:ext cx="7772400" cy="406400"/>
-          </a:xfrm>
-          <a:prstGeom prst="rect">
-            <a:avLst/>
-          </a:prstGeom>
-          <a:noFill/>
-          <a:effectLst/>
-        </p:spPr>
-        <p:txBody>
-          <a:bodyPr wrap="square" anchor="t" lIns="0" rIns="0" tIns="0" bIns="0">
-            <a:spAutoFit/>
-          </a:bodyPr>
-          <a:lstStyle/>
-          <a:p>
-            <a:pPr algn="l">
-              <a:lnSpc>
-                <a:spcPct val="105000"/>
-              </a:lnSpc>
-              <a:spcAft>
-                <a:spcPts val="0"/>
-              </a:spcAft>
-            </a:pPr>
-            <a:r>
-              <a:rPr sz="2600" b="1" i="0">
-                <a:solidFill>
-                  <a:srgbClr val="262422"/>
-                </a:solidFill>
-                <a:latin typeface="Libre Caslon Display"/>
-              </a:rPr>
-              <a:t>Who paid for the review?</a:t>
-            </a:r>
-          </a:p>
-        </p:txBody>
-      </p:sp>
-      <p:sp>
-        <p:nvSpPr>
-          <p:cNvPr id="6" name="Rectangle 5"/>
+          </a:p>
+        </p:txBody>
+      </p:sp>
+      <p:sp>
+        <p:nvSpPr>
+          <p:cNvPr id="8" name="Rectangle 7"/>
           <p:cNvSpPr/>
           <p:nvPr/>
         </p:nvSpPr>
         <p:spPr>
           <a:xfrm>
-            <a:off x="685800" y="1115568"/>
-            <a:ext cx="5120640" cy="2834640"/>
+            <a:off x="2130552" y="1463040"/>
+            <a:ext cx="18288" cy="2024252"/>
           </a:xfrm>
           <a:prstGeom prst="rect">
             <a:avLst/>
           </a:prstGeom>
           <a:solidFill>
-            <a:srgbClr val="FFFFFF"/>
+            <a:srgbClr val="C85A64"/>
           </a:solidFill>
           <a:ln>
             <a:noFill/>
@@ -20956,16 +20604,16 @@
       </p:sp>
       <p:sp>
         <p:nvSpPr>
-          <p:cNvPr id="7" name="Rectangle 6"/>
+          <p:cNvPr id="9" name="Oval 8"/>
           <p:cNvSpPr/>
           <p:nvPr/>
         </p:nvSpPr>
         <p:spPr>
           <a:xfrm>
-            <a:off x="685800" y="1115568"/>
-            <a:ext cx="5120640" cy="45720"/>
-          </a:xfrm>
-          <a:prstGeom prst="rect">
+            <a:off x="2066543" y="1380744"/>
+            <a:ext cx="146304" cy="146304"/>
+          </a:xfrm>
+          <a:prstGeom prst="ellipse">
             <a:avLst/>
           </a:prstGeom>
           <a:solidFill>
@@ -21000,57 +20648,99 @@
       </p:sp>
       <p:sp>
         <p:nvSpPr>
-          <p:cNvPr id="8" name="Rectangle 7"/>
+          <p:cNvPr id="10" name="TextBox 9"/>
+          <p:cNvSpPr txBox="1"/>
+          <p:nvPr/>
+        </p:nvSpPr>
+        <p:spPr>
+          <a:xfrm>
+            <a:off x="850392" y="1353312"/>
+            <a:ext cx="1133856" cy="237744"/>
+          </a:xfrm>
+          <a:prstGeom prst="rect">
+            <a:avLst/>
+          </a:prstGeom>
+          <a:noFill/>
+          <a:effectLst/>
+        </p:spPr>
+        <p:txBody>
+          <a:bodyPr wrap="square" anchor="t" lIns="0" rIns="0" tIns="0" bIns="0">
+            <a:spAutoFit/>
+          </a:bodyPr>
+          <a:lstStyle/>
+          <a:p>
+            <a:pPr algn="r">
+              <a:lnSpc>
+                <a:spcPct val="125000"/>
+              </a:lnSpc>
+              <a:spcAft>
+                <a:spcPts val="0"/>
+              </a:spcAft>
+            </a:pPr>
+            <a:r>
+              <a:rPr sz="1200" b="0" i="0">
+                <a:solidFill>
+                  <a:srgbClr val="AD2E3C"/>
+                </a:solidFill>
+                <a:latin typeface="Georgia"/>
+              </a:rPr>
+              <a:t>1965</a:t>
+            </a:r>
+          </a:p>
+        </p:txBody>
+      </p:sp>
+      <p:sp>
+        <p:nvSpPr>
+          <p:cNvPr id="11" name="TextBox 10"/>
+          <p:cNvSpPr txBox="1"/>
+          <p:nvPr/>
+        </p:nvSpPr>
+        <p:spPr>
+          <a:xfrm>
+            <a:off x="2350008" y="1353312"/>
+            <a:ext cx="3255263" cy="500062"/>
+          </a:xfrm>
+          <a:prstGeom prst="rect">
+            <a:avLst/>
+          </a:prstGeom>
+          <a:noFill/>
+          <a:effectLst/>
+        </p:spPr>
+        <p:txBody>
+          <a:bodyPr wrap="square" anchor="t" lIns="0" rIns="0" tIns="0" bIns="0">
+            <a:spAutoFit/>
+          </a:bodyPr>
+          <a:lstStyle/>
+          <a:p>
+            <a:pPr algn="l">
+              <a:lnSpc>
+                <a:spcPct val="120000"/>
+              </a:lnSpc>
+              <a:spcAft>
+                <a:spcPts val="0"/>
+              </a:spcAft>
+            </a:pPr>
+            <a:r>
+              <a:rPr sz="1050" b="0" i="0">
+                <a:solidFill>
+                  <a:srgbClr val="262422"/>
+                </a:solidFill>
+                <a:latin typeface="Calibri"/>
+              </a:rPr>
+              <a:t>The Sugar Research Foundation pays two Harvard scientists $6,500 to write a review of the studies blaming sugar.</a:t>
+            </a:r>
+          </a:p>
+        </p:txBody>
+      </p:sp>
+      <p:sp>
+        <p:nvSpPr>
+          <p:cNvPr id="12" name="Oval 11"/>
           <p:cNvSpPr/>
           <p:nvPr/>
         </p:nvSpPr>
         <p:spPr>
           <a:xfrm>
-            <a:off x="2130552" y="1463040"/>
-            <a:ext cx="18288" cy="2024252"/>
-          </a:xfrm>
-          <a:prstGeom prst="rect">
-            <a:avLst/>
-          </a:prstGeom>
-          <a:solidFill>
-            <a:srgbClr val="C85A64"/>
-          </a:solidFill>
-          <a:ln>
-            <a:noFill/>
-          </a:ln>
-          <a:effectLst/>
-        </p:spPr>
-        <p:style>
-          <a:lnRef idx="1">
-            <a:schemeClr val="accent1"/>
-          </a:lnRef>
-          <a:fillRef idx="3">
-            <a:schemeClr val="accent1"/>
-          </a:fillRef>
-          <a:effectRef idx="0">
-            <a:schemeClr val="accent1"/>
-          </a:effectRef>
-          <a:fontRef idx="minor">
-            <a:schemeClr val="lt1"/>
-          </a:fontRef>
-        </p:style>
-        <p:txBody>
-          <a:bodyPr rtlCol="0" anchor="ctr"/>
-          <a:lstStyle/>
-          <a:p>
-            <a:pPr algn="ctr"/>
-          </a:p>
-        </p:txBody>
-      </p:sp>
-      <p:sp>
-        <p:nvSpPr>
-          <p:cNvPr id="9" name="Oval 8"/>
-          <p:cNvSpPr/>
-          <p:nvPr/>
-        </p:nvSpPr>
-        <p:spPr>
-          <a:xfrm>
-            <a:off x="2066543" y="1380744"/>
+            <a:off x="2066543" y="2027110"/>
             <a:ext cx="146304" cy="146304"/>
           </a:xfrm>
           <a:prstGeom prst="ellipse">
@@ -21088,13 +20778,13 @@
       </p:sp>
       <p:sp>
         <p:nvSpPr>
-          <p:cNvPr id="10" name="TextBox 9"/>
-          <p:cNvSpPr txBox="1"/>
-          <p:nvPr/>
-        </p:nvSpPr>
-        <p:spPr>
-          <a:xfrm>
-            <a:off x="850392" y="1353312"/>
+          <p:cNvPr id="13" name="TextBox 12"/>
+          <p:cNvSpPr txBox="1"/>
+          <p:nvPr/>
+        </p:nvSpPr>
+        <p:spPr>
+          <a:xfrm>
+            <a:off x="850392" y="1999678"/>
             <a:ext cx="1133856" cy="237744"/>
           </a:xfrm>
           <a:prstGeom prst="rect">
@@ -21118,26 +20808,26 @@
               </a:spcAft>
             </a:pPr>
             <a:r>
-              <a:rPr sz="1200" b="1" i="0">
+              <a:rPr sz="1200" b="0" i="0">
                 <a:solidFill>
                   <a:srgbClr val="AD2E3C"/>
                 </a:solidFill>
-                <a:latin typeface="Libre Caslon Display"/>
-              </a:rPr>
-              <a:t>1965</a:t>
-            </a:r>
-          </a:p>
-        </p:txBody>
-      </p:sp>
-      <p:sp>
-        <p:nvSpPr>
-          <p:cNvPr id="11" name="TextBox 10"/>
-          <p:cNvSpPr txBox="1"/>
-          <p:nvPr/>
-        </p:nvSpPr>
-        <p:spPr>
-          <a:xfrm>
-            <a:off x="2350008" y="1353312"/>
+                <a:latin typeface="Georgia"/>
+              </a:rPr>
+              <a:t>Before print</a:t>
+            </a:r>
+          </a:p>
+        </p:txBody>
+      </p:sp>
+      <p:sp>
+        <p:nvSpPr>
+          <p:cNvPr id="14" name="TextBox 13"/>
+          <p:cNvSpPr txBox="1"/>
+          <p:nvPr/>
+        </p:nvSpPr>
+        <p:spPr>
+          <a:xfrm>
+            <a:off x="2350008" y="1999678"/>
             <a:ext cx="3255263" cy="500062"/>
           </a:xfrm>
           <a:prstGeom prst="rect">
@@ -21165,22 +20855,22 @@
                 <a:solidFill>
                   <a:srgbClr val="262422"/>
                 </a:solidFill>
-                <a:latin typeface="Karla"/>
-              </a:rPr>
-              <a:t>The Sugar Research Foundation pays two Harvard scientists $6,500 to write a review of the studies blaming sugar.</a:t>
-            </a:r>
-          </a:p>
-        </p:txBody>
-      </p:sp>
-      <p:sp>
-        <p:nvSpPr>
-          <p:cNvPr id="12" name="Oval 11"/>
+                <a:latin typeface="Calibri"/>
+              </a:rPr>
+              <a:t>The industry reads a draft and writes back: “Let me assure you this is quite what we had in mind.”</a:t>
+            </a:r>
+          </a:p>
+        </p:txBody>
+      </p:sp>
+      <p:sp>
+        <p:nvSpPr>
+          <p:cNvPr id="15" name="Oval 14"/>
           <p:cNvSpPr/>
           <p:nvPr/>
         </p:nvSpPr>
         <p:spPr>
           <a:xfrm>
-            <a:off x="2066543" y="2027110"/>
+            <a:off x="2066543" y="2673477"/>
             <a:ext cx="146304" cy="146304"/>
           </a:xfrm>
           <a:prstGeom prst="ellipse">
@@ -21218,13 +20908,13 @@
       </p:sp>
       <p:sp>
         <p:nvSpPr>
-          <p:cNvPr id="13" name="TextBox 12"/>
-          <p:cNvSpPr txBox="1"/>
-          <p:nvPr/>
-        </p:nvSpPr>
-        <p:spPr>
-          <a:xfrm>
-            <a:off x="850392" y="1999678"/>
+          <p:cNvPr id="16" name="TextBox 15"/>
+          <p:cNvSpPr txBox="1"/>
+          <p:nvPr/>
+        </p:nvSpPr>
+        <p:spPr>
+          <a:xfrm>
+            <a:off x="850392" y="2646045"/>
             <a:ext cx="1133856" cy="237744"/>
           </a:xfrm>
           <a:prstGeom prst="rect">
@@ -21248,27 +20938,27 @@
               </a:spcAft>
             </a:pPr>
             <a:r>
-              <a:rPr sz="1200" b="1" i="0">
+              <a:rPr sz="1200" b="0" i="0">
                 <a:solidFill>
                   <a:srgbClr val="AD2E3C"/>
                 </a:solidFill>
-                <a:latin typeface="Libre Caslon Display"/>
-              </a:rPr>
-              <a:t>Before print</a:t>
-            </a:r>
-          </a:p>
-        </p:txBody>
-      </p:sp>
-      <p:sp>
-        <p:nvSpPr>
-          <p:cNvPr id="14" name="TextBox 13"/>
-          <p:cNvSpPr txBox="1"/>
-          <p:nvPr/>
-        </p:nvSpPr>
-        <p:spPr>
-          <a:xfrm>
-            <a:off x="2350008" y="1999678"/>
-            <a:ext cx="3255263" cy="500062"/>
+                <a:latin typeface="Georgia"/>
+              </a:rPr>
+              <a:t>1967</a:t>
+            </a:r>
+          </a:p>
+        </p:txBody>
+      </p:sp>
+      <p:sp>
+        <p:nvSpPr>
+          <p:cNvPr id="17" name="TextBox 16"/>
+          <p:cNvSpPr txBox="1"/>
+          <p:nvPr/>
+        </p:nvSpPr>
+        <p:spPr>
+          <a:xfrm>
+            <a:off x="2350008" y="2646045"/>
+            <a:ext cx="3255263" cy="365760"/>
           </a:xfrm>
           <a:prstGeom prst="rect">
             <a:avLst/>
@@ -21295,22 +20985,22 @@
                 <a:solidFill>
                   <a:srgbClr val="262422"/>
                 </a:solidFill>
-                <a:latin typeface="Karla"/>
-              </a:rPr>
-              <a:t>The industry reads a draft and writes back: “Let me assure you this is quite what we had in mind.”</a:t>
-            </a:r>
-          </a:p>
-        </p:txBody>
-      </p:sp>
-      <p:sp>
-        <p:nvSpPr>
-          <p:cNvPr id="15" name="Oval 14"/>
+                <a:latin typeface="Calibri"/>
+              </a:rPr>
+              <a:t>The review is published. It never mentions who paid for it, and at the time journals did not ask.</a:t>
+            </a:r>
+          </a:p>
+        </p:txBody>
+      </p:sp>
+      <p:sp>
+        <p:nvSpPr>
+          <p:cNvPr id="18" name="Oval 17"/>
           <p:cNvSpPr/>
           <p:nvPr/>
         </p:nvSpPr>
         <p:spPr>
           <a:xfrm>
-            <a:off x="2066543" y="2673477"/>
+            <a:off x="2066543" y="3185541"/>
             <a:ext cx="146304" cy="146304"/>
           </a:xfrm>
           <a:prstGeom prst="ellipse">
@@ -21348,136 +21038,6 @@
       </p:sp>
       <p:sp>
         <p:nvSpPr>
-          <p:cNvPr id="16" name="TextBox 15"/>
-          <p:cNvSpPr txBox="1"/>
-          <p:nvPr/>
-        </p:nvSpPr>
-        <p:spPr>
-          <a:xfrm>
-            <a:off x="850392" y="2646045"/>
-            <a:ext cx="1133856" cy="237744"/>
-          </a:xfrm>
-          <a:prstGeom prst="rect">
-            <a:avLst/>
-          </a:prstGeom>
-          <a:noFill/>
-          <a:effectLst/>
-        </p:spPr>
-        <p:txBody>
-          <a:bodyPr wrap="square" anchor="t" lIns="0" rIns="0" tIns="0" bIns="0">
-            <a:spAutoFit/>
-          </a:bodyPr>
-          <a:lstStyle/>
-          <a:p>
-            <a:pPr algn="r">
-              <a:lnSpc>
-                <a:spcPct val="125000"/>
-              </a:lnSpc>
-              <a:spcAft>
-                <a:spcPts val="0"/>
-              </a:spcAft>
-            </a:pPr>
-            <a:r>
-              <a:rPr sz="1200" b="1" i="0">
-                <a:solidFill>
-                  <a:srgbClr val="AD2E3C"/>
-                </a:solidFill>
-                <a:latin typeface="Libre Caslon Display"/>
-              </a:rPr>
-              <a:t>1967</a:t>
-            </a:r>
-          </a:p>
-        </p:txBody>
-      </p:sp>
-      <p:sp>
-        <p:nvSpPr>
-          <p:cNvPr id="17" name="TextBox 16"/>
-          <p:cNvSpPr txBox="1"/>
-          <p:nvPr/>
-        </p:nvSpPr>
-        <p:spPr>
-          <a:xfrm>
-            <a:off x="2350008" y="2646045"/>
-            <a:ext cx="3255263" cy="365760"/>
-          </a:xfrm>
-          <a:prstGeom prst="rect">
-            <a:avLst/>
-          </a:prstGeom>
-          <a:noFill/>
-          <a:effectLst/>
-        </p:spPr>
-        <p:txBody>
-          <a:bodyPr wrap="square" anchor="t" lIns="0" rIns="0" tIns="0" bIns="0">
-            <a:spAutoFit/>
-          </a:bodyPr>
-          <a:lstStyle/>
-          <a:p>
-            <a:pPr algn="l">
-              <a:lnSpc>
-                <a:spcPct val="120000"/>
-              </a:lnSpc>
-              <a:spcAft>
-                <a:spcPts val="0"/>
-              </a:spcAft>
-            </a:pPr>
-            <a:r>
-              <a:rPr sz="1050" b="0" i="0">
-                <a:solidFill>
-                  <a:srgbClr val="262422"/>
-                </a:solidFill>
-                <a:latin typeface="Karla"/>
-              </a:rPr>
-              <a:t>The review is published. It never mentions who paid for it, and at the time journals did not ask.</a:t>
-            </a:r>
-          </a:p>
-        </p:txBody>
-      </p:sp>
-      <p:sp>
-        <p:nvSpPr>
-          <p:cNvPr id="18" name="Oval 17"/>
-          <p:cNvSpPr/>
-          <p:nvPr/>
-        </p:nvSpPr>
-        <p:spPr>
-          <a:xfrm>
-            <a:off x="2066543" y="3185541"/>
-            <a:ext cx="146304" cy="146304"/>
-          </a:xfrm>
-          <a:prstGeom prst="ellipse">
-            <a:avLst/>
-          </a:prstGeom>
-          <a:solidFill>
-            <a:srgbClr val="AD2E3C"/>
-          </a:solidFill>
-          <a:ln>
-            <a:noFill/>
-          </a:ln>
-          <a:effectLst/>
-        </p:spPr>
-        <p:style>
-          <a:lnRef idx="1">
-            <a:schemeClr val="accent1"/>
-          </a:lnRef>
-          <a:fillRef idx="3">
-            <a:schemeClr val="accent1"/>
-          </a:fillRef>
-          <a:effectRef idx="0">
-            <a:schemeClr val="accent1"/>
-          </a:effectRef>
-          <a:fontRef idx="minor">
-            <a:schemeClr val="lt1"/>
-          </a:fontRef>
-        </p:style>
-        <p:txBody>
-          <a:bodyPr rtlCol="0" anchor="ctr"/>
-          <a:lstStyle/>
-          <a:p>
-            <a:pPr algn="ctr"/>
-          </a:p>
-        </p:txBody>
-      </p:sp>
-      <p:sp>
-        <p:nvSpPr>
           <p:cNvPr id="19" name="TextBox 18"/>
           <p:cNvSpPr txBox="1"/>
           <p:nvPr/>
@@ -21508,11 +21068,11 @@
               </a:spcAft>
             </a:pPr>
             <a:r>
-              <a:rPr sz="1200" b="1" i="0">
+              <a:rPr sz="1200" b="0" i="0">
                 <a:solidFill>
                   <a:srgbClr val="AD2E3C"/>
                 </a:solidFill>
-                <a:latin typeface="Libre Caslon Display"/>
+                <a:latin typeface="Georgia"/>
               </a:rPr>
               <a:t>2016</a:t>
             </a:r>
@@ -21555,7 +21115,7 @@
                 <a:solidFill>
                   <a:srgbClr val="262422"/>
                 </a:solidFill>
-                <a:latin typeface="Karla"/>
+                <a:latin typeface="Calibri"/>
               </a:rPr>
               <a:t>A researcher, Cristin Kearns, finds the letters in a Harvard library, and the story comes out.</a:t>
             </a:r>
@@ -21642,7 +21202,7 @@
                 <a:solidFill>
                   <a:srgbClr val="AD2E3C"/>
                 </a:solidFill>
-                <a:latin typeface="Karla"/>
+                <a:latin typeface="Calibri"/>
               </a:rPr>
               <a:t>WHERE THIS COMES FROM</a:t>
             </a:r>
@@ -21685,7 +21245,7 @@
                 <a:solidFill>
                   <a:srgbClr val="262422"/>
                 </a:solidFill>
-                <a:latin typeface="Karla"/>
+                <a:latin typeface="Calibri"/>
               </a:rPr>
               <a:t>$6,500 in 1965 is about $48,000 in 2016 money. Letters found by Kearns, Schmidt and Glantz, JAMA Internal Medicine, 2016.</a:t>
             </a:r>
@@ -21724,11 +21284,11 @@
               </a:spcAft>
             </a:pPr>
             <a:r>
-              <a:rPr sz="1500" b="1" i="0">
+              <a:rPr sz="1500" b="0" i="0">
                 <a:solidFill>
                   <a:srgbClr val="AD2E3C"/>
                 </a:solidFill>
-                <a:latin typeface="Libre Caslon Display"/>
+                <a:latin typeface="Georgia"/>
               </a:rPr>
               <a:t>What does this change about the front page?</a:t>
             </a:r>
@@ -21796,7 +21356,7 @@
                 <a:solidFill>
                   <a:srgbClr val="8C877D"/>
                 </a:solidFill>
-                <a:latin typeface="Karla"/>
+                <a:latin typeface="Calibri"/>
               </a:rPr>
               <a:t>The Pastoral Guide</a:t>
             </a:r>
@@ -21839,7 +21399,7 @@
                 <a:solidFill>
                   <a:srgbClr val="8C877D"/>
                 </a:solidFill>
-                <a:latin typeface="Karla"/>
+                <a:latin typeface="Calibri"/>
               </a:rPr>
               <a:t>5 / 23</a:t>
             </a:r>
@@ -21944,7 +21504,7 @@
                 <a:solidFill>
                   <a:srgbClr val="AD2E3C"/>
                 </a:solidFill>
-                <a:latin typeface="Karla"/>
+                <a:latin typeface="Calibri"/>
               </a:rPr>
               <a:t>BUSTED  ·  MONDAY  ·  STORY 1 OF 5</a:t>
             </a:r>
@@ -21983,11 +21543,11 @@
               </a:spcAft>
             </a:pPr>
             <a:r>
-              <a:rPr sz="2800" b="1" i="0">
+              <a:rPr sz="2800" b="0" i="0">
                 <a:solidFill>
                   <a:srgbClr val="262422"/>
                 </a:solidFill>
-                <a:latin typeface="Libre Caslon Display"/>
+                <a:latin typeface="Georgia"/>
               </a:rPr>
               <a:t>What really happened</a:t>
             </a:r>
@@ -22088,7 +21648,7 @@
                 <a:solidFill>
                   <a:srgbClr val="AD2E3C"/>
                 </a:solidFill>
-                <a:latin typeface="Karla"/>
+                <a:latin typeface="Calibri"/>
               </a:rPr>
               <a:t>BUSTED</a:t>
             </a:r>
@@ -22175,7 +21735,7 @@
                 <a:solidFill>
                   <a:srgbClr val="FFFDF7"/>
                 </a:solidFill>
-                <a:latin typeface="Karla"/>
+                <a:latin typeface="Calibri"/>
               </a:rPr>
               <a:t>1</a:t>
             </a:r>
@@ -22218,7 +21778,7 @@
                 <a:solidFill>
                   <a:srgbClr val="262422"/>
                 </a:solidFill>
-                <a:latin typeface="Karla"/>
+                <a:latin typeface="Calibri"/>
               </a:rPr>
               <a:t>The sugar industry paid for the review, read it before it was published, and nobody reading it was told.</a:t>
             </a:r>
@@ -22305,7 +21865,7 @@
                 <a:solidFill>
                   <a:srgbClr val="FFFDF7"/>
                 </a:solidFill>
-                <a:latin typeface="Karla"/>
+                <a:latin typeface="Calibri"/>
               </a:rPr>
               <a:t>2</a:t>
             </a:r>
@@ -22348,7 +21908,7 @@
                 <a:solidFill>
                   <a:srgbClr val="262422"/>
                 </a:solidFill>
-                <a:latin typeface="Karla"/>
+                <a:latin typeface="Calibri"/>
               </a:rPr>
               <a:t>One of the researchers who found the letters said the review delayed agreement about sugar and heart disease for decades.</a:t>
             </a:r>
@@ -22435,7 +21995,7 @@
                 <a:solidFill>
                   <a:srgbClr val="FFFDF7"/>
                 </a:solidFill>
-                <a:latin typeface="Karla"/>
+                <a:latin typeface="Calibri"/>
               </a:rPr>
               <a:t>3</a:t>
             </a:r>
@@ -22478,7 +22038,7 @@
                 <a:solidFill>
                   <a:srgbClr val="262422"/>
                 </a:solidFill>
-                <a:latin typeface="Karla"/>
+                <a:latin typeface="Calibri"/>
               </a:rPr>
               <a:t>Today, health advice says to cut down on both added sugar and saturated fat. The review picked one and waved the other away.</a:t>
             </a:r>
@@ -22565,7 +22125,7 @@
                 <a:solidFill>
                   <a:srgbClr val="EBC4C6"/>
                 </a:solidFill>
-                <a:latin typeface="Karla"/>
+                <a:latin typeface="Calibri"/>
               </a:rPr>
               <a:t>THE QUESTION THAT WOULD HAVE CAUGHT IT</a:t>
             </a:r>
@@ -22604,11 +22164,11 @@
               </a:spcAft>
             </a:pPr>
             <a:r>
-              <a:rPr sz="1800" b="1" i="0">
+              <a:rPr sz="1800" b="0" i="0">
                 <a:solidFill>
                   <a:srgbClr val="FFFDF7"/>
                 </a:solidFill>
-                <a:latin typeface="Libre Caslon Display"/>
+                <a:latin typeface="Georgia"/>
               </a:rPr>
               <a:t>Who paid for it?</a:t>
             </a:r>
@@ -22676,7 +22236,7 @@
                 <a:solidFill>
                   <a:srgbClr val="8C877D"/>
                 </a:solidFill>
-                <a:latin typeface="Karla"/>
+                <a:latin typeface="Calibri"/>
               </a:rPr>
               <a:t>The Pastoral Guide</a:t>
             </a:r>
@@ -22719,7 +22279,7 @@
                 <a:solidFill>
                   <a:srgbClr val="8C877D"/>
                 </a:solidFill>
-                <a:latin typeface="Karla"/>
+                <a:latin typeface="Calibri"/>
               </a:rPr>
               <a:t>6 / 23</a:t>
             </a:r>
@@ -22824,7 +22384,7 @@
                 <a:solidFill>
                   <a:srgbClr val="AD2E3C"/>
                 </a:solidFill>
-                <a:latin typeface="Karla"/>
+                <a:latin typeface="Calibri"/>
               </a:rPr>
               <a:t>BUSTED  ·  TUESDAY</a:t>
             </a:r>
@@ -22867,7 +22427,7 @@
                 <a:solidFill>
                   <a:srgbClr val="8C877D"/>
                 </a:solidFill>
-                <a:latin typeface="Karla"/>
+                <a:latin typeface="Calibri"/>
               </a:rPr>
               <a:t>A recreated front page</a:t>
             </a:r>
@@ -22950,11 +22510,11 @@
               </a:spcAft>
             </a:pPr>
             <a:r>
-              <a:rPr sz="3000" b="1" i="0">
+              <a:rPr sz="3000" b="0" i="0">
                 <a:solidFill>
                   <a:srgbClr val="262422"/>
                 </a:solidFill>
-                <a:latin typeface="Libre Caslon Display"/>
+                <a:latin typeface="Georgia"/>
               </a:rPr>
               <a:t>The Daily Claim</a:t>
             </a:r>
@@ -23041,7 +22601,7 @@
                 <a:solidFill>
                   <a:srgbClr val="56524B"/>
                 </a:solidFill>
-                <a:latin typeface="Karla"/>
+                <a:latin typeface="Calibri"/>
               </a:rPr>
               <a:t>LONDON, 1958</a:t>
             </a:r>
@@ -23084,7 +22644,7 @@
                 <a:solidFill>
                   <a:srgbClr val="56524B"/>
                 </a:solidFill>
-                <a:latin typeface="Karla"/>
+                <a:latin typeface="Calibri"/>
               </a:rPr>
               <a:t>VOLUME ONE</a:t>
             </a:r>
@@ -23127,7 +22687,7 @@
                 <a:solidFill>
                   <a:srgbClr val="56524B"/>
                 </a:solidFill>
-                <a:latin typeface="Karla"/>
+                <a:latin typeface="Calibri"/>
               </a:rPr>
               <a:t>STORY 2 OF 5</a:t>
             </a:r>
@@ -23210,11 +22770,11 @@
               </a:spcAft>
             </a:pPr>
             <a:r>
-              <a:rPr sz="2800" b="1" i="0">
+              <a:rPr sz="2800" b="0" i="0">
                 <a:solidFill>
                   <a:srgbClr val="262422"/>
                 </a:solidFill>
-                <a:latin typeface="Libre Caslon Display"/>
+                <a:latin typeface="Georgia"/>
               </a:rPr>
               <a:t>NEW SLEEPING PILL IS SAFE</a:t>
             </a:r>
@@ -23222,11 +22782,11 @@
               <a:rPr lang="en-GB"/>
             </a:br>
             <a:r>
-              <a:rPr sz="2800" b="1" i="0">
+              <a:rPr sz="2800" b="0" i="0">
                 <a:solidFill>
                   <a:srgbClr val="262422"/>
                 </a:solidFill>
-                <a:latin typeface="Libre Caslon Display"/>
+                <a:latin typeface="Georgia"/>
               </a:rPr>
               <a:t>FOR MOTHERS-TO-BE</a:t>
             </a:r>
@@ -23614,11 +23174,11 @@
               </a:spcAft>
             </a:pPr>
             <a:r>
-              <a:rPr sz="1200" b="1" i="0">
+              <a:rPr sz="1200" b="0" i="0">
                 <a:solidFill>
                   <a:srgbClr val="AD2E3C"/>
                 </a:solidFill>
-                <a:latin typeface="Libre Caslon Display"/>
+                <a:latin typeface="Georgia"/>
               </a:rPr>
               <a:t>“Distaval can be given with complete safety to pregnant women and nursing mothers…”</a:t>
             </a:r>
@@ -23661,7 +23221,7 @@
                 <a:solidFill>
                   <a:srgbClr val="56524B"/>
                 </a:solidFill>
-                <a:latin typeface="Karla"/>
+                <a:latin typeface="Calibri"/>
               </a:rPr>
               <a:t>FROM AN ADVERT FOR DISTAVAL</a:t>
             </a:r>
@@ -23729,7 +23289,7 @@
                 <a:solidFill>
                   <a:srgbClr val="8C877D"/>
                 </a:solidFill>
-                <a:latin typeface="Karla"/>
+                <a:latin typeface="Calibri"/>
               </a:rPr>
               <a:t>The Pastoral Guide</a:t>
             </a:r>
@@ -23772,7 +23332,7 @@
                 <a:solidFill>
                   <a:srgbClr val="8C877D"/>
                 </a:solidFill>
-                <a:latin typeface="Karla"/>
+                <a:latin typeface="Calibri"/>
               </a:rPr>
               <a:t>7 / 23</a:t>
             </a:r>
@@ -23877,64 +23437,9 @@
                 <a:solidFill>
                   <a:srgbClr val="AD2E3C"/>
                 </a:solidFill>
-                <a:latin typeface="Karla"/>
+                <a:latin typeface="Calibri"/>
               </a:rPr>
               <a:t>BUSTED  ·  TUESDAY  ·  STORY 2 OF 5</a:t>
-            </a:r>
-          </a:p>
-        </p:txBody>
-      </p:sp>
-      <p:sp>
-        <p:nvSpPr>
-          <p:cNvPr id="4" name="Rounded Rectangle 3"/>
-          <p:cNvSpPr/>
-          <p:nvPr/>
-        </p:nvSpPr>
-        <p:spPr>
-          <a:xfrm>
-            <a:off x="7640472" y="246888"/>
-            <a:ext cx="817727" cy="237744"/>
-          </a:xfrm>
-          <a:prstGeom prst="roundRect">
-            <a:avLst>
-              <a:gd name="adj" fmla="val 50000"/>
-            </a:avLst>
-          </a:prstGeom>
-          <a:solidFill>
-            <a:srgbClr val="AD2E3C"/>
-          </a:solidFill>
-          <a:ln>
-            <a:noFill/>
-          </a:ln>
-          <a:effectLst/>
-        </p:spPr>
-        <p:style>
-          <a:lnRef idx="1">
-            <a:schemeClr val="accent1"/>
-          </a:lnRef>
-          <a:fillRef idx="3">
-            <a:schemeClr val="accent1"/>
-          </a:fillRef>
-          <a:effectRef idx="0">
-            <a:schemeClr val="accent1"/>
-          </a:effectRef>
-          <a:fontRef idx="minor">
-            <a:schemeClr val="lt1"/>
-          </a:fontRef>
-        </p:style>
-        <p:txBody>
-          <a:bodyPr rtlCol="0" anchor="ctr" wrap="none" lIns="0" rIns="0" tIns="0" bIns="0"/>
-          <a:lstStyle/>
-          <a:p>
-            <a:pPr algn="ctr"/>
-            <a:r>
-              <a:rPr sz="950" b="1" spc="90">
-                <a:solidFill>
-                  <a:srgbClr val="FFFDF7"/>
-                </a:solidFill>
-                <a:latin typeface="Karla"/>
-              </a:rPr>
-              <a:t>ARGUE</a:t>
             </a:r>
           </a:p>
         </p:txBody>
@@ -23975,7 +23480,7 @@
                 <a:solidFill>
                   <a:srgbClr val="56524B"/>
                 </a:solidFill>
-                <a:latin typeface="Karla"/>
+                <a:latin typeface="Calibri"/>
               </a:rPr>
               <a:t>THE CLAIM</a:t>
             </a:r>
@@ -24108,11 +23613,11 @@
               </a:spcAft>
             </a:pPr>
             <a:r>
-              <a:rPr sz="2100" b="1" i="0">
+              <a:rPr sz="2100" b="0" i="0">
                 <a:solidFill>
                   <a:srgbClr val="AD2E3C"/>
                 </a:solidFill>
-                <a:latin typeface="Libre Caslon Display"/>
+                <a:latin typeface="Georgia"/>
               </a:rPr>
               <a:t>“If a medicine is sold by a big company and prescribed by doctors, it must have been tested properly.”</a:t>
             </a:r>
@@ -24155,7 +23660,7 @@
                 <a:solidFill>
                   <a:srgbClr val="262422"/>
                 </a:solidFill>
-                <a:latin typeface="Karla"/>
+                <a:latin typeface="Calibri"/>
               </a:rPr>
               <a:t>Hands up for agree, then for disagree, then two or three people say why.</a:t>
             </a:r>
@@ -24307,11 +23812,11 @@
               </a:spcAft>
             </a:pPr>
             <a:r>
-              <a:rPr sz="1400" b="1" i="0">
+              <a:rPr sz="1400" b="0" i="0">
                 <a:solidFill>
                   <a:srgbClr val="262422"/>
                 </a:solidFill>
-                <a:latin typeface="Libre Caslon Display"/>
+                <a:latin typeface="Georgia"/>
               </a:rPr>
               <a:t>Who is saying it?</a:t>
             </a:r>
@@ -24463,11 +23968,11 @@
               </a:spcAft>
             </a:pPr>
             <a:r>
-              <a:rPr sz="1400" b="1" i="0">
+              <a:rPr sz="1400" b="0" i="0">
                 <a:solidFill>
                   <a:srgbClr val="262422"/>
                 </a:solidFill>
-                <a:latin typeface="Libre Caslon Display"/>
+                <a:latin typeface="Georgia"/>
               </a:rPr>
               <a:t>Who gains if you believe it?</a:t>
             </a:r>
@@ -24619,11 +24124,11 @@
               </a:spcAft>
             </a:pPr>
             <a:r>
-              <a:rPr sz="1400" b="1" i="0">
+              <a:rPr sz="1400" b="0" i="0">
                 <a:solidFill>
                   <a:srgbClr val="262422"/>
                 </a:solidFill>
-                <a:latin typeface="Libre Caslon Display"/>
+                <a:latin typeface="Georgia"/>
               </a:rPr>
               <a:t>What would you need to see first?</a:t>
             </a:r>
@@ -24691,7 +24196,7 @@
                 <a:solidFill>
                   <a:srgbClr val="8C877D"/>
                 </a:solidFill>
-                <a:latin typeface="Karla"/>
+                <a:latin typeface="Calibri"/>
               </a:rPr>
               <a:t>The Pastoral Guide</a:t>
             </a:r>
@@ -24734,7 +24239,7 @@
                 <a:solidFill>
                   <a:srgbClr val="8C877D"/>
                 </a:solidFill>
-                <a:latin typeface="Karla"/>
+                <a:latin typeface="Calibri"/>
               </a:rPr>
               <a:t>8 / 23</a:t>
             </a:r>
@@ -24839,64 +24344,9 @@
                 <a:solidFill>
                   <a:srgbClr val="AD2E3C"/>
                 </a:solidFill>
-                <a:latin typeface="Karla"/>
+                <a:latin typeface="Calibri"/>
               </a:rPr>
               <a:t>BUSTED  ·  TUESDAY  ·  STORY 2 OF 5</a:t>
-            </a:r>
-          </a:p>
-        </p:txBody>
-      </p:sp>
-      <p:sp>
-        <p:nvSpPr>
-          <p:cNvPr id="4" name="Rounded Rectangle 3"/>
-          <p:cNvSpPr/>
-          <p:nvPr/>
-        </p:nvSpPr>
-        <p:spPr>
-          <a:xfrm>
-            <a:off x="7406333" y="246888"/>
-            <a:ext cx="1051866" cy="237744"/>
-          </a:xfrm>
-          <a:prstGeom prst="roundRect">
-            <a:avLst>
-              <a:gd name="adj" fmla="val 50000"/>
-            </a:avLst>
-          </a:prstGeom>
-          <a:solidFill>
-            <a:srgbClr val="AD2E3C"/>
-          </a:solidFill>
-          <a:ln>
-            <a:noFill/>
-          </a:ln>
-          <a:effectLst/>
-        </p:spPr>
-        <p:style>
-          <a:lnRef idx="1">
-            <a:schemeClr val="accent1"/>
-          </a:lnRef>
-          <a:fillRef idx="3">
-            <a:schemeClr val="accent1"/>
-          </a:fillRef>
-          <a:effectRef idx="0">
-            <a:schemeClr val="accent1"/>
-          </a:effectRef>
-          <a:fontRef idx="minor">
-            <a:schemeClr val="lt1"/>
-          </a:fontRef>
-        </p:style>
-        <p:txBody>
-          <a:bodyPr rtlCol="0" anchor="ctr" wrap="none" lIns="0" rIns="0" tIns="0" bIns="0"/>
-          <a:lstStyle/>
-          <a:p>
-            <a:pPr algn="ctr"/>
-            <a:r>
-              <a:rPr sz="950" b="1" spc="90">
-                <a:solidFill>
-                  <a:srgbClr val="FFFDF7"/>
-                </a:solidFill>
-                <a:latin typeface="Karla"/>
-              </a:rPr>
-              <a:t>EVIDENCE</a:t>
             </a:r>
           </a:p>
         </p:txBody>
@@ -24933,11 +24383,11 @@
               </a:spcAft>
             </a:pPr>
             <a:r>
-              <a:rPr sz="2600" b="1" i="0">
+              <a:rPr sz="2600" b="0" i="0">
                 <a:solidFill>
                   <a:srgbClr val="262422"/>
                 </a:solidFill>
-                <a:latin typeface="Libre Caslon Display"/>
+                <a:latin typeface="Georgia"/>
               </a:rPr>
               <a:t>Babies harmed by thalidomide</a:t>
             </a:r>
@@ -25086,7 +24536,7 @@
                 <a:solidFill>
                   <a:srgbClr val="56524B"/>
                 </a:solidFill>
-                <a:latin typeface="Karla"/>
+                <a:latin typeface="Calibri"/>
               </a:rPr>
               <a:t>Babies</a:t>
             </a:r>
@@ -25173,7 +24623,7 @@
                 <a:solidFill>
                   <a:srgbClr val="AD2E3C"/>
                 </a:solidFill>
-                <a:latin typeface="Karla"/>
+                <a:latin typeface="Calibri"/>
               </a:rPr>
               <a:t>WHERE THIS COMES FROM</a:t>
             </a:r>
@@ -25216,7 +24666,7 @@
                 <a:solidFill>
                   <a:srgbClr val="262422"/>
                 </a:solidFill>
-                <a:latin typeface="Karla"/>
+                <a:latin typeface="Calibri"/>
               </a:rPr>
               <a:t>Both countries had the drug. In the United States it was only ever given out in trials, because one official at the medicines regulator, Frances Kelsey, refused to approve it.</a:t>
             </a:r>
@@ -25255,11 +24705,11 @@
               </a:spcAft>
             </a:pPr>
             <a:r>
-              <a:rPr sz="1500" b="1" i="0">
+              <a:rPr sz="1500" b="0" i="0">
                 <a:solidFill>
                   <a:srgbClr val="AD2E3C"/>
                 </a:solidFill>
-                <a:latin typeface="Libre Caslon Display"/>
+                <a:latin typeface="Georgia"/>
               </a:rPr>
               <a:t>Why is one bar so much smaller than the other?</a:t>
             </a:r>
@@ -25327,7 +24777,7 @@
                 <a:solidFill>
                   <a:srgbClr val="8C877D"/>
                 </a:solidFill>
-                <a:latin typeface="Karla"/>
+                <a:latin typeface="Calibri"/>
               </a:rPr>
               <a:t>The Pastoral Guide</a:t>
             </a:r>
@@ -25370,7 +24820,7 @@
                 <a:solidFill>
                   <a:srgbClr val="8C877D"/>
                 </a:solidFill>
-                <a:latin typeface="Karla"/>
+                <a:latin typeface="Calibri"/>
               </a:rPr>
               <a:t>9 / 23</a:t>
             </a:r>
